--- a/TEMPLATE_slides.pptx
+++ b/TEMPLATE_slides.pptx
@@ -2,20 +2,22 @@
 <file path=ppt/presentation.xml><?xml version="1.0" encoding="utf-8"?>
 <p:presentation xmlns:a="http://schemas.openxmlformats.org/drawingml/2006/main" xmlns:r="http://schemas.openxmlformats.org/officeDocument/2006/relationships" xmlns:p="http://schemas.openxmlformats.org/presentationml/2006/main" saveSubsetFonts="1" autoCompressPictures="0">
   <p:sldMasterIdLst>
-    <p:sldMasterId id="2147483648" r:id="rId1"/>
+    <p:sldMasterId id="2147483660" r:id="rId1"/>
   </p:sldMasterIdLst>
   <p:sldIdLst>
-    <p:sldId id="256" r:id="rId2"/>
-    <p:sldId id="274" r:id="rId3"/>
-    <p:sldId id="276" r:id="rId4"/>
+    <p:sldId id="274" r:id="rId2"/>
+    <p:sldId id="276" r:id="rId3"/>
+    <p:sldId id="277" r:id="rId4"/>
+    <p:sldId id="278" r:id="rId5"/>
+    <p:sldId id="279" r:id="rId6"/>
   </p:sldIdLst>
-  <p:sldSz cx="12192000" cy="6858000"/>
+  <p:sldSz cx="9144000" cy="6858000" type="screen4x3"/>
   <p:notesSz cx="6858000" cy="9144000"/>
   <p:defaultTextStyle>
     <a:defPPr>
       <a:defRPr lang="en-US"/>
     </a:defPPr>
-    <a:lvl1pPr marL="0" algn="l" defTabSz="914400" rtl="0" eaLnBrk="1" latinLnBrk="0" hangingPunct="1">
+    <a:lvl1pPr marL="0" algn="l" defTabSz="457200" rtl="0" eaLnBrk="1" latinLnBrk="0" hangingPunct="1">
       <a:defRPr sz="1800" kern="1200">
         <a:solidFill>
           <a:schemeClr val="tx1"/>
@@ -25,7 +27,7 @@
         <a:cs typeface="+mn-cs"/>
       </a:defRPr>
     </a:lvl1pPr>
-    <a:lvl2pPr marL="457200" algn="l" defTabSz="914400" rtl="0" eaLnBrk="1" latinLnBrk="0" hangingPunct="1">
+    <a:lvl2pPr marL="457200" algn="l" defTabSz="457200" rtl="0" eaLnBrk="1" latinLnBrk="0" hangingPunct="1">
       <a:defRPr sz="1800" kern="1200">
         <a:solidFill>
           <a:schemeClr val="tx1"/>
@@ -35,7 +37,7 @@
         <a:cs typeface="+mn-cs"/>
       </a:defRPr>
     </a:lvl2pPr>
-    <a:lvl3pPr marL="914400" algn="l" defTabSz="914400" rtl="0" eaLnBrk="1" latinLnBrk="0" hangingPunct="1">
+    <a:lvl3pPr marL="914400" algn="l" defTabSz="457200" rtl="0" eaLnBrk="1" latinLnBrk="0" hangingPunct="1">
       <a:defRPr sz="1800" kern="1200">
         <a:solidFill>
           <a:schemeClr val="tx1"/>
@@ -45,7 +47,7 @@
         <a:cs typeface="+mn-cs"/>
       </a:defRPr>
     </a:lvl3pPr>
-    <a:lvl4pPr marL="1371600" algn="l" defTabSz="914400" rtl="0" eaLnBrk="1" latinLnBrk="0" hangingPunct="1">
+    <a:lvl4pPr marL="1371600" algn="l" defTabSz="457200" rtl="0" eaLnBrk="1" latinLnBrk="0" hangingPunct="1">
       <a:defRPr sz="1800" kern="1200">
         <a:solidFill>
           <a:schemeClr val="tx1"/>
@@ -55,7 +57,7 @@
         <a:cs typeface="+mn-cs"/>
       </a:defRPr>
     </a:lvl4pPr>
-    <a:lvl5pPr marL="1828800" algn="l" defTabSz="914400" rtl="0" eaLnBrk="1" latinLnBrk="0" hangingPunct="1">
+    <a:lvl5pPr marL="1828800" algn="l" defTabSz="457200" rtl="0" eaLnBrk="1" latinLnBrk="0" hangingPunct="1">
       <a:defRPr sz="1800" kern="1200">
         <a:solidFill>
           <a:schemeClr val="tx1"/>
@@ -65,7 +67,7 @@
         <a:cs typeface="+mn-cs"/>
       </a:defRPr>
     </a:lvl5pPr>
-    <a:lvl6pPr marL="2286000" algn="l" defTabSz="914400" rtl="0" eaLnBrk="1" latinLnBrk="0" hangingPunct="1">
+    <a:lvl6pPr marL="2286000" algn="l" defTabSz="457200" rtl="0" eaLnBrk="1" latinLnBrk="0" hangingPunct="1">
       <a:defRPr sz="1800" kern="1200">
         <a:solidFill>
           <a:schemeClr val="tx1"/>
@@ -75,7 +77,7 @@
         <a:cs typeface="+mn-cs"/>
       </a:defRPr>
     </a:lvl6pPr>
-    <a:lvl7pPr marL="2743200" algn="l" defTabSz="914400" rtl="0" eaLnBrk="1" latinLnBrk="0" hangingPunct="1">
+    <a:lvl7pPr marL="2743200" algn="l" defTabSz="457200" rtl="0" eaLnBrk="1" latinLnBrk="0" hangingPunct="1">
       <a:defRPr sz="1800" kern="1200">
         <a:solidFill>
           <a:schemeClr val="tx1"/>
@@ -85,7 +87,7 @@
         <a:cs typeface="+mn-cs"/>
       </a:defRPr>
     </a:lvl7pPr>
-    <a:lvl8pPr marL="3200400" algn="l" defTabSz="914400" rtl="0" eaLnBrk="1" latinLnBrk="0" hangingPunct="1">
+    <a:lvl8pPr marL="3200400" algn="l" defTabSz="457200" rtl="0" eaLnBrk="1" latinLnBrk="0" hangingPunct="1">
       <a:defRPr sz="1800" kern="1200">
         <a:solidFill>
           <a:schemeClr val="tx1"/>
@@ -95,7 +97,7 @@
         <a:cs typeface="+mn-cs"/>
       </a:defRPr>
     </a:lvl8pPr>
-    <a:lvl9pPr marL="3657600" algn="l" defTabSz="914400" rtl="0" eaLnBrk="1" latinLnBrk="0" hangingPunct="1">
+    <a:lvl9pPr marL="3657600" algn="l" defTabSz="457200" rtl="0" eaLnBrk="1" latinLnBrk="0" hangingPunct="1">
       <a:defRPr sz="1800" kern="1200">
         <a:solidFill>
           <a:schemeClr val="tx1"/>
@@ -133,13 +135,7 @@
       </p:grpSpPr>
       <p:sp>
         <p:nvSpPr>
-          <p:cNvPr id="2" name="Title 1">
-            <a:extLst>
-              <a:ext uri="{FF2B5EF4-FFF2-40B4-BE49-F238E27FC236}">
-                <a16:creationId xmlns:a16="http://schemas.microsoft.com/office/drawing/2014/main" id="{50FC4881-024B-CA4F-1A53-33C2DC0E7490}"/>
-              </a:ext>
-            </a:extLst>
-          </p:cNvPr>
+          <p:cNvPr id="2" name="Title 1"/>
           <p:cNvSpPr>
             <a:spLocks noGrp="1"/>
           </p:cNvSpPr>
@@ -149,8 +145,8 @@
         </p:nvSpPr>
         <p:spPr>
           <a:xfrm>
-            <a:off x="1524000" y="1122363"/>
-            <a:ext cx="9144000" cy="2387600"/>
+            <a:off x="685800" y="1122363"/>
+            <a:ext cx="7772400" cy="2387600"/>
           </a:xfrm>
         </p:spPr>
         <p:txBody>
@@ -165,18 +161,13 @@
               <a:rPr lang="en-US"/>
               <a:t>Click to edit Master title style</a:t>
             </a:r>
-          </a:p>
-        </p:txBody>
-      </p:sp>
-      <p:sp>
-        <p:nvSpPr>
-          <p:cNvPr id="3" name="Subtitle 2">
-            <a:extLst>
-              <a:ext uri="{FF2B5EF4-FFF2-40B4-BE49-F238E27FC236}">
-                <a16:creationId xmlns:a16="http://schemas.microsoft.com/office/drawing/2014/main" id="{8B0D2959-CEED-C8E4-130C-7C436E2473A7}"/>
-              </a:ext>
-            </a:extLst>
-          </p:cNvPr>
+            <a:endParaRPr lang="en-US" dirty="0"/>
+          </a:p>
+        </p:txBody>
+      </p:sp>
+      <p:sp>
+        <p:nvSpPr>
+          <p:cNvPr id="3" name="Subtitle 2"/>
           <p:cNvSpPr>
             <a:spLocks noGrp="1"/>
           </p:cNvSpPr>
@@ -186,8 +177,8 @@
         </p:nvSpPr>
         <p:spPr>
           <a:xfrm>
-            <a:off x="1524000" y="3602038"/>
-            <a:ext cx="9144000" cy="1655762"/>
+            <a:off x="1143000" y="3602038"/>
+            <a:ext cx="6858000" cy="1655762"/>
           </a:xfrm>
         </p:spPr>
         <p:txBody>
@@ -235,18 +226,13 @@
               <a:rPr lang="en-US"/>
               <a:t>Click to edit Master subtitle style</a:t>
             </a:r>
-          </a:p>
-        </p:txBody>
-      </p:sp>
-      <p:sp>
-        <p:nvSpPr>
-          <p:cNvPr id="4" name="Date Placeholder 3">
-            <a:extLst>
-              <a:ext uri="{FF2B5EF4-FFF2-40B4-BE49-F238E27FC236}">
-                <a16:creationId xmlns:a16="http://schemas.microsoft.com/office/drawing/2014/main" id="{4ABBB692-36FC-D0C6-12D7-33A0E66EA065}"/>
-              </a:ext>
-            </a:extLst>
-          </p:cNvPr>
+            <a:endParaRPr lang="en-US" dirty="0"/>
+          </a:p>
+        </p:txBody>
+      </p:sp>
+      <p:sp>
+        <p:nvSpPr>
+          <p:cNvPr id="4" name="Date Placeholder 3"/>
           <p:cNvSpPr>
             <a:spLocks noGrp="1"/>
           </p:cNvSpPr>
@@ -261,7 +247,7 @@
           <a:p>
             <a:fld id="{E759A0DE-F190-5444-87AC-4719D5F20D15}" type="datetimeFigureOut">
               <a:rPr lang="en-US" smtClean="0"/>
-              <a:t>6/10/26</a:t>
+              <a:t>6/13/26</a:t>
             </a:fld>
             <a:endParaRPr lang="en-US"/>
           </a:p>
@@ -269,13 +255,7 @@
       </p:sp>
       <p:sp>
         <p:nvSpPr>
-          <p:cNvPr id="5" name="Footer Placeholder 4">
-            <a:extLst>
-              <a:ext uri="{FF2B5EF4-FFF2-40B4-BE49-F238E27FC236}">
-                <a16:creationId xmlns:a16="http://schemas.microsoft.com/office/drawing/2014/main" id="{51817876-8CFB-960B-6A57-C7F9FD39D3EC}"/>
-              </a:ext>
-            </a:extLst>
-          </p:cNvPr>
+          <p:cNvPr id="5" name="Footer Placeholder 4"/>
           <p:cNvSpPr>
             <a:spLocks noGrp="1"/>
           </p:cNvSpPr>
@@ -294,13 +274,7 @@
       </p:sp>
       <p:sp>
         <p:nvSpPr>
-          <p:cNvPr id="6" name="Slide Number Placeholder 5">
-            <a:extLst>
-              <a:ext uri="{FF2B5EF4-FFF2-40B4-BE49-F238E27FC236}">
-                <a16:creationId xmlns:a16="http://schemas.microsoft.com/office/drawing/2014/main" id="{DB548E83-1153-3307-5818-CD7F2833A3F5}"/>
-              </a:ext>
-            </a:extLst>
-          </p:cNvPr>
+          <p:cNvPr id="6" name="Slide Number Placeholder 5"/>
           <p:cNvSpPr>
             <a:spLocks noGrp="1"/>
           </p:cNvSpPr>
@@ -324,7 +298,7 @@
     </p:spTree>
     <p:extLst>
       <p:ext uri="{BB962C8B-B14F-4D97-AF65-F5344CB8AC3E}">
-        <p14:creationId xmlns:p14="http://schemas.microsoft.com/office/powerpoint/2010/main" val="2594881872"/>
+        <p14:creationId xmlns:p14="http://schemas.microsoft.com/office/powerpoint/2010/main" val="87880011"/>
       </p:ext>
     </p:extLst>
   </p:cSld>
@@ -353,13 +327,7 @@
       </p:grpSpPr>
       <p:sp>
         <p:nvSpPr>
-          <p:cNvPr id="2" name="Title 1">
-            <a:extLst>
-              <a:ext uri="{FF2B5EF4-FFF2-40B4-BE49-F238E27FC236}">
-                <a16:creationId xmlns:a16="http://schemas.microsoft.com/office/drawing/2014/main" id="{9015C597-3152-5765-EBC1-B17D9951543D}"/>
-              </a:ext>
-            </a:extLst>
-          </p:cNvPr>
+          <p:cNvPr id="2" name="Title 1"/>
           <p:cNvSpPr>
             <a:spLocks noGrp="1"/>
           </p:cNvSpPr>
@@ -376,18 +344,13 @@
               <a:rPr lang="en-US"/>
               <a:t>Click to edit Master title style</a:t>
             </a:r>
-          </a:p>
-        </p:txBody>
-      </p:sp>
-      <p:sp>
-        <p:nvSpPr>
-          <p:cNvPr id="3" name="Vertical Text Placeholder 2">
-            <a:extLst>
-              <a:ext uri="{FF2B5EF4-FFF2-40B4-BE49-F238E27FC236}">
-                <a16:creationId xmlns:a16="http://schemas.microsoft.com/office/drawing/2014/main" id="{5BA5F73E-18E1-021C-9878-B37DC31E2802}"/>
-              </a:ext>
-            </a:extLst>
-          </p:cNvPr>
+            <a:endParaRPr lang="en-US" dirty="0"/>
+          </a:p>
+        </p:txBody>
+      </p:sp>
+      <p:sp>
+        <p:nvSpPr>
+          <p:cNvPr id="3" name="Vertical Text Placeholder 2"/>
           <p:cNvSpPr>
             <a:spLocks noGrp="1"/>
           </p:cNvSpPr>
@@ -433,18 +396,13 @@
               <a:rPr lang="en-US"/>
               <a:t>Fifth level</a:t>
             </a:r>
-          </a:p>
-        </p:txBody>
-      </p:sp>
-      <p:sp>
-        <p:nvSpPr>
-          <p:cNvPr id="4" name="Date Placeholder 3">
-            <a:extLst>
-              <a:ext uri="{FF2B5EF4-FFF2-40B4-BE49-F238E27FC236}">
-                <a16:creationId xmlns:a16="http://schemas.microsoft.com/office/drawing/2014/main" id="{B683AF53-E0B5-2F63-C15E-4BF621A3186B}"/>
-              </a:ext>
-            </a:extLst>
-          </p:cNvPr>
+            <a:endParaRPr lang="en-US" dirty="0"/>
+          </a:p>
+        </p:txBody>
+      </p:sp>
+      <p:sp>
+        <p:nvSpPr>
+          <p:cNvPr id="4" name="Date Placeholder 3"/>
           <p:cNvSpPr>
             <a:spLocks noGrp="1"/>
           </p:cNvSpPr>
@@ -459,7 +417,7 @@
           <a:p>
             <a:fld id="{E759A0DE-F190-5444-87AC-4719D5F20D15}" type="datetimeFigureOut">
               <a:rPr lang="en-US" smtClean="0"/>
-              <a:t>6/10/26</a:t>
+              <a:t>6/13/26</a:t>
             </a:fld>
             <a:endParaRPr lang="en-US"/>
           </a:p>
@@ -467,13 +425,7 @@
       </p:sp>
       <p:sp>
         <p:nvSpPr>
-          <p:cNvPr id="5" name="Footer Placeholder 4">
-            <a:extLst>
-              <a:ext uri="{FF2B5EF4-FFF2-40B4-BE49-F238E27FC236}">
-                <a16:creationId xmlns:a16="http://schemas.microsoft.com/office/drawing/2014/main" id="{D1CA465D-C46F-7FA4-9154-773B74869505}"/>
-              </a:ext>
-            </a:extLst>
-          </p:cNvPr>
+          <p:cNvPr id="5" name="Footer Placeholder 4"/>
           <p:cNvSpPr>
             <a:spLocks noGrp="1"/>
           </p:cNvSpPr>
@@ -492,13 +444,7 @@
       </p:sp>
       <p:sp>
         <p:nvSpPr>
-          <p:cNvPr id="6" name="Slide Number Placeholder 5">
-            <a:extLst>
-              <a:ext uri="{FF2B5EF4-FFF2-40B4-BE49-F238E27FC236}">
-                <a16:creationId xmlns:a16="http://schemas.microsoft.com/office/drawing/2014/main" id="{BBA3BEE5-DE05-B54F-20CA-E8C336AE957E}"/>
-              </a:ext>
-            </a:extLst>
-          </p:cNvPr>
+          <p:cNvPr id="6" name="Slide Number Placeholder 5"/>
           <p:cNvSpPr>
             <a:spLocks noGrp="1"/>
           </p:cNvSpPr>
@@ -522,7 +468,7 @@
     </p:spTree>
     <p:extLst>
       <p:ext uri="{BB962C8B-B14F-4D97-AF65-F5344CB8AC3E}">
-        <p14:creationId xmlns:p14="http://schemas.microsoft.com/office/powerpoint/2010/main" val="3115587574"/>
+        <p14:creationId xmlns:p14="http://schemas.microsoft.com/office/powerpoint/2010/main" val="3708245266"/>
       </p:ext>
     </p:extLst>
   </p:cSld>
@@ -551,13 +497,7 @@
       </p:grpSpPr>
       <p:sp>
         <p:nvSpPr>
-          <p:cNvPr id="2" name="Vertical Title 1">
-            <a:extLst>
-              <a:ext uri="{FF2B5EF4-FFF2-40B4-BE49-F238E27FC236}">
-                <a16:creationId xmlns:a16="http://schemas.microsoft.com/office/drawing/2014/main" id="{42C72931-C193-DCDC-01FD-20CDA0AD4513}"/>
-              </a:ext>
-            </a:extLst>
-          </p:cNvPr>
+          <p:cNvPr id="2" name="Vertical Title 1"/>
           <p:cNvSpPr>
             <a:spLocks noGrp="1"/>
           </p:cNvSpPr>
@@ -567,8 +507,8 @@
         </p:nvSpPr>
         <p:spPr>
           <a:xfrm>
-            <a:off x="8724900" y="365125"/>
-            <a:ext cx="2628900" cy="5811838"/>
+            <a:off x="6543675" y="365125"/>
+            <a:ext cx="1971675" cy="5811838"/>
           </a:xfrm>
         </p:spPr>
         <p:txBody>
@@ -579,18 +519,13 @@
               <a:rPr lang="en-US"/>
               <a:t>Click to edit Master title style</a:t>
             </a:r>
-          </a:p>
-        </p:txBody>
-      </p:sp>
-      <p:sp>
-        <p:nvSpPr>
-          <p:cNvPr id="3" name="Vertical Text Placeholder 2">
-            <a:extLst>
-              <a:ext uri="{FF2B5EF4-FFF2-40B4-BE49-F238E27FC236}">
-                <a16:creationId xmlns:a16="http://schemas.microsoft.com/office/drawing/2014/main" id="{E65B2C1B-4D9D-9A62-13D7-01C6580B781D}"/>
-              </a:ext>
-            </a:extLst>
-          </p:cNvPr>
+            <a:endParaRPr lang="en-US" dirty="0"/>
+          </a:p>
+        </p:txBody>
+      </p:sp>
+      <p:sp>
+        <p:nvSpPr>
+          <p:cNvPr id="3" name="Vertical Text Placeholder 2"/>
           <p:cNvSpPr>
             <a:spLocks noGrp="1"/>
           </p:cNvSpPr>
@@ -600,8 +535,8 @@
         </p:nvSpPr>
         <p:spPr>
           <a:xfrm>
-            <a:off x="838200" y="365125"/>
-            <a:ext cx="7734300" cy="5811838"/>
+            <a:off x="628650" y="365125"/>
+            <a:ext cx="5800725" cy="5811838"/>
           </a:xfrm>
         </p:spPr>
         <p:txBody>
@@ -641,18 +576,13 @@
               <a:rPr lang="en-US"/>
               <a:t>Fifth level</a:t>
             </a:r>
-          </a:p>
-        </p:txBody>
-      </p:sp>
-      <p:sp>
-        <p:nvSpPr>
-          <p:cNvPr id="4" name="Date Placeholder 3">
-            <a:extLst>
-              <a:ext uri="{FF2B5EF4-FFF2-40B4-BE49-F238E27FC236}">
-                <a16:creationId xmlns:a16="http://schemas.microsoft.com/office/drawing/2014/main" id="{57445465-66E1-00A0-A5D2-D034616CC34D}"/>
-              </a:ext>
-            </a:extLst>
-          </p:cNvPr>
+            <a:endParaRPr lang="en-US" dirty="0"/>
+          </a:p>
+        </p:txBody>
+      </p:sp>
+      <p:sp>
+        <p:nvSpPr>
+          <p:cNvPr id="4" name="Date Placeholder 3"/>
           <p:cNvSpPr>
             <a:spLocks noGrp="1"/>
           </p:cNvSpPr>
@@ -667,7 +597,7 @@
           <a:p>
             <a:fld id="{E759A0DE-F190-5444-87AC-4719D5F20D15}" type="datetimeFigureOut">
               <a:rPr lang="en-US" smtClean="0"/>
-              <a:t>6/10/26</a:t>
+              <a:t>6/13/26</a:t>
             </a:fld>
             <a:endParaRPr lang="en-US"/>
           </a:p>
@@ -675,13 +605,7 @@
       </p:sp>
       <p:sp>
         <p:nvSpPr>
-          <p:cNvPr id="5" name="Footer Placeholder 4">
-            <a:extLst>
-              <a:ext uri="{FF2B5EF4-FFF2-40B4-BE49-F238E27FC236}">
-                <a16:creationId xmlns:a16="http://schemas.microsoft.com/office/drawing/2014/main" id="{F253519E-C69A-9396-C73F-1ACB40774508}"/>
-              </a:ext>
-            </a:extLst>
-          </p:cNvPr>
+          <p:cNvPr id="5" name="Footer Placeholder 4"/>
           <p:cNvSpPr>
             <a:spLocks noGrp="1"/>
           </p:cNvSpPr>
@@ -700,13 +624,7 @@
       </p:sp>
       <p:sp>
         <p:nvSpPr>
-          <p:cNvPr id="6" name="Slide Number Placeholder 5">
-            <a:extLst>
-              <a:ext uri="{FF2B5EF4-FFF2-40B4-BE49-F238E27FC236}">
-                <a16:creationId xmlns:a16="http://schemas.microsoft.com/office/drawing/2014/main" id="{CC85BFC6-ABA4-44D2-E110-CE59D7D2AE43}"/>
-              </a:ext>
-            </a:extLst>
-          </p:cNvPr>
+          <p:cNvPr id="6" name="Slide Number Placeholder 5"/>
           <p:cNvSpPr>
             <a:spLocks noGrp="1"/>
           </p:cNvSpPr>
@@ -730,7 +648,7 @@
     </p:spTree>
     <p:extLst>
       <p:ext uri="{BB962C8B-B14F-4D97-AF65-F5344CB8AC3E}">
-        <p14:creationId xmlns:p14="http://schemas.microsoft.com/office/powerpoint/2010/main" val="1588597314"/>
+        <p14:creationId xmlns:p14="http://schemas.microsoft.com/office/powerpoint/2010/main" val="2509224612"/>
       </p:ext>
     </p:extLst>
   </p:cSld>
@@ -759,13 +677,7 @@
       </p:grpSpPr>
       <p:sp>
         <p:nvSpPr>
-          <p:cNvPr id="2" name="Title 1">
-            <a:extLst>
-              <a:ext uri="{FF2B5EF4-FFF2-40B4-BE49-F238E27FC236}">
-                <a16:creationId xmlns:a16="http://schemas.microsoft.com/office/drawing/2014/main" id="{A4C6B7EA-B38C-12D1-5730-E271A11FB914}"/>
-              </a:ext>
-            </a:extLst>
-          </p:cNvPr>
+          <p:cNvPr id="2" name="Title 1"/>
           <p:cNvSpPr>
             <a:spLocks noGrp="1"/>
           </p:cNvSpPr>
@@ -782,18 +694,13 @@
               <a:rPr lang="en-US"/>
               <a:t>Click to edit Master title style</a:t>
             </a:r>
-          </a:p>
-        </p:txBody>
-      </p:sp>
-      <p:sp>
-        <p:nvSpPr>
-          <p:cNvPr id="3" name="Content Placeholder 2">
-            <a:extLst>
-              <a:ext uri="{FF2B5EF4-FFF2-40B4-BE49-F238E27FC236}">
-                <a16:creationId xmlns:a16="http://schemas.microsoft.com/office/drawing/2014/main" id="{5D8D1A30-880C-91DF-D6D6-0BE623BC9F03}"/>
-              </a:ext>
-            </a:extLst>
-          </p:cNvPr>
+            <a:endParaRPr lang="en-US" dirty="0"/>
+          </a:p>
+        </p:txBody>
+      </p:sp>
+      <p:sp>
+        <p:nvSpPr>
+          <p:cNvPr id="3" name="Content Placeholder 2"/>
           <p:cNvSpPr>
             <a:spLocks noGrp="1"/>
           </p:cNvSpPr>
@@ -839,18 +746,13 @@
               <a:rPr lang="en-US"/>
               <a:t>Fifth level</a:t>
             </a:r>
-          </a:p>
-        </p:txBody>
-      </p:sp>
-      <p:sp>
-        <p:nvSpPr>
-          <p:cNvPr id="4" name="Date Placeholder 3">
-            <a:extLst>
-              <a:ext uri="{FF2B5EF4-FFF2-40B4-BE49-F238E27FC236}">
-                <a16:creationId xmlns:a16="http://schemas.microsoft.com/office/drawing/2014/main" id="{27753098-E2DC-41B2-9361-756938A8EBFE}"/>
-              </a:ext>
-            </a:extLst>
-          </p:cNvPr>
+            <a:endParaRPr lang="en-US" dirty="0"/>
+          </a:p>
+        </p:txBody>
+      </p:sp>
+      <p:sp>
+        <p:nvSpPr>
+          <p:cNvPr id="4" name="Date Placeholder 3"/>
           <p:cNvSpPr>
             <a:spLocks noGrp="1"/>
           </p:cNvSpPr>
@@ -865,7 +767,7 @@
           <a:p>
             <a:fld id="{E759A0DE-F190-5444-87AC-4719D5F20D15}" type="datetimeFigureOut">
               <a:rPr lang="en-US" smtClean="0"/>
-              <a:t>6/10/26</a:t>
+              <a:t>6/13/26</a:t>
             </a:fld>
             <a:endParaRPr lang="en-US"/>
           </a:p>
@@ -873,13 +775,7 @@
       </p:sp>
       <p:sp>
         <p:nvSpPr>
-          <p:cNvPr id="5" name="Footer Placeholder 4">
-            <a:extLst>
-              <a:ext uri="{FF2B5EF4-FFF2-40B4-BE49-F238E27FC236}">
-                <a16:creationId xmlns:a16="http://schemas.microsoft.com/office/drawing/2014/main" id="{E463E6B5-5EA8-FE6C-FA06-4515DC0C07A4}"/>
-              </a:ext>
-            </a:extLst>
-          </p:cNvPr>
+          <p:cNvPr id="5" name="Footer Placeholder 4"/>
           <p:cNvSpPr>
             <a:spLocks noGrp="1"/>
           </p:cNvSpPr>
@@ -898,13 +794,7 @@
       </p:sp>
       <p:sp>
         <p:nvSpPr>
-          <p:cNvPr id="6" name="Slide Number Placeholder 5">
-            <a:extLst>
-              <a:ext uri="{FF2B5EF4-FFF2-40B4-BE49-F238E27FC236}">
-                <a16:creationId xmlns:a16="http://schemas.microsoft.com/office/drawing/2014/main" id="{196A6D58-9856-3B55-DBEA-1B9A3269B325}"/>
-              </a:ext>
-            </a:extLst>
-          </p:cNvPr>
+          <p:cNvPr id="6" name="Slide Number Placeholder 5"/>
           <p:cNvSpPr>
             <a:spLocks noGrp="1"/>
           </p:cNvSpPr>
@@ -928,7 +818,7 @@
     </p:spTree>
     <p:extLst>
       <p:ext uri="{BB962C8B-B14F-4D97-AF65-F5344CB8AC3E}">
-        <p14:creationId xmlns:p14="http://schemas.microsoft.com/office/powerpoint/2010/main" val="1474312020"/>
+        <p14:creationId xmlns:p14="http://schemas.microsoft.com/office/powerpoint/2010/main" val="4110991596"/>
       </p:ext>
     </p:extLst>
   </p:cSld>
@@ -957,13 +847,7 @@
       </p:grpSpPr>
       <p:sp>
         <p:nvSpPr>
-          <p:cNvPr id="2" name="Title 1">
-            <a:extLst>
-              <a:ext uri="{FF2B5EF4-FFF2-40B4-BE49-F238E27FC236}">
-                <a16:creationId xmlns:a16="http://schemas.microsoft.com/office/drawing/2014/main" id="{F3003BE6-BFB2-0EF8-7BD3-99B4FF56B7C7}"/>
-              </a:ext>
-            </a:extLst>
-          </p:cNvPr>
+          <p:cNvPr id="2" name="Title 1"/>
           <p:cNvSpPr>
             <a:spLocks noGrp="1"/>
           </p:cNvSpPr>
@@ -973,8 +857,8 @@
         </p:nvSpPr>
         <p:spPr>
           <a:xfrm>
-            <a:off x="831850" y="1709738"/>
-            <a:ext cx="10515600" cy="2852737"/>
+            <a:off x="623888" y="1709739"/>
+            <a:ext cx="7886700" cy="2852737"/>
           </a:xfrm>
         </p:spPr>
         <p:txBody>
@@ -989,18 +873,13 @@
               <a:rPr lang="en-US"/>
               <a:t>Click to edit Master title style</a:t>
             </a:r>
-          </a:p>
-        </p:txBody>
-      </p:sp>
-      <p:sp>
-        <p:nvSpPr>
-          <p:cNvPr id="3" name="Text Placeholder 2">
-            <a:extLst>
-              <a:ext uri="{FF2B5EF4-FFF2-40B4-BE49-F238E27FC236}">
-                <a16:creationId xmlns:a16="http://schemas.microsoft.com/office/drawing/2014/main" id="{95E87140-F157-4DFF-CE20-2F5B759FC1E1}"/>
-              </a:ext>
-            </a:extLst>
-          </p:cNvPr>
+            <a:endParaRPr lang="en-US" dirty="0"/>
+          </a:p>
+        </p:txBody>
+      </p:sp>
+      <p:sp>
+        <p:nvSpPr>
+          <p:cNvPr id="3" name="Text Placeholder 2"/>
           <p:cNvSpPr>
             <a:spLocks noGrp="1"/>
           </p:cNvSpPr>
@@ -1010,8 +889,8 @@
         </p:nvSpPr>
         <p:spPr>
           <a:xfrm>
-            <a:off x="831850" y="4589463"/>
-            <a:ext cx="10515600" cy="1500187"/>
+            <a:off x="623888" y="4589464"/>
+            <a:ext cx="7886700" cy="1500187"/>
           </a:xfrm>
         </p:spPr>
         <p:txBody>
@@ -1119,13 +998,7 @@
       </p:sp>
       <p:sp>
         <p:nvSpPr>
-          <p:cNvPr id="4" name="Date Placeholder 3">
-            <a:extLst>
-              <a:ext uri="{FF2B5EF4-FFF2-40B4-BE49-F238E27FC236}">
-                <a16:creationId xmlns:a16="http://schemas.microsoft.com/office/drawing/2014/main" id="{E119DC89-D1D7-E179-4B62-551014DFE5B3}"/>
-              </a:ext>
-            </a:extLst>
-          </p:cNvPr>
+          <p:cNvPr id="4" name="Date Placeholder 3"/>
           <p:cNvSpPr>
             <a:spLocks noGrp="1"/>
           </p:cNvSpPr>
@@ -1140,7 +1013,7 @@
           <a:p>
             <a:fld id="{E759A0DE-F190-5444-87AC-4719D5F20D15}" type="datetimeFigureOut">
               <a:rPr lang="en-US" smtClean="0"/>
-              <a:t>6/10/26</a:t>
+              <a:t>6/13/26</a:t>
             </a:fld>
             <a:endParaRPr lang="en-US"/>
           </a:p>
@@ -1148,13 +1021,7 @@
       </p:sp>
       <p:sp>
         <p:nvSpPr>
-          <p:cNvPr id="5" name="Footer Placeholder 4">
-            <a:extLst>
-              <a:ext uri="{FF2B5EF4-FFF2-40B4-BE49-F238E27FC236}">
-                <a16:creationId xmlns:a16="http://schemas.microsoft.com/office/drawing/2014/main" id="{0DC033CF-70D2-4EFC-5477-15F7486A8F3C}"/>
-              </a:ext>
-            </a:extLst>
-          </p:cNvPr>
+          <p:cNvPr id="5" name="Footer Placeholder 4"/>
           <p:cNvSpPr>
             <a:spLocks noGrp="1"/>
           </p:cNvSpPr>
@@ -1173,13 +1040,7 @@
       </p:sp>
       <p:sp>
         <p:nvSpPr>
-          <p:cNvPr id="6" name="Slide Number Placeholder 5">
-            <a:extLst>
-              <a:ext uri="{FF2B5EF4-FFF2-40B4-BE49-F238E27FC236}">
-                <a16:creationId xmlns:a16="http://schemas.microsoft.com/office/drawing/2014/main" id="{797ECCF9-ED4E-20EE-67CD-F55D0D853A8C}"/>
-              </a:ext>
-            </a:extLst>
-          </p:cNvPr>
+          <p:cNvPr id="6" name="Slide Number Placeholder 5"/>
           <p:cNvSpPr>
             <a:spLocks noGrp="1"/>
           </p:cNvSpPr>
@@ -1203,7 +1064,7 @@
     </p:spTree>
     <p:extLst>
       <p:ext uri="{BB962C8B-B14F-4D97-AF65-F5344CB8AC3E}">
-        <p14:creationId xmlns:p14="http://schemas.microsoft.com/office/powerpoint/2010/main" val="3736666041"/>
+        <p14:creationId xmlns:p14="http://schemas.microsoft.com/office/powerpoint/2010/main" val="1377733004"/>
       </p:ext>
     </p:extLst>
   </p:cSld>
@@ -1232,13 +1093,7 @@
       </p:grpSpPr>
       <p:sp>
         <p:nvSpPr>
-          <p:cNvPr id="2" name="Title 1">
-            <a:extLst>
-              <a:ext uri="{FF2B5EF4-FFF2-40B4-BE49-F238E27FC236}">
-                <a16:creationId xmlns:a16="http://schemas.microsoft.com/office/drawing/2014/main" id="{74DD7124-6407-E388-DFAC-CEAEF342D72D}"/>
-              </a:ext>
-            </a:extLst>
-          </p:cNvPr>
+          <p:cNvPr id="2" name="Title 1"/>
           <p:cNvSpPr>
             <a:spLocks noGrp="1"/>
           </p:cNvSpPr>
@@ -1255,18 +1110,13 @@
               <a:rPr lang="en-US"/>
               <a:t>Click to edit Master title style</a:t>
             </a:r>
-          </a:p>
-        </p:txBody>
-      </p:sp>
-      <p:sp>
-        <p:nvSpPr>
-          <p:cNvPr id="3" name="Content Placeholder 2">
-            <a:extLst>
-              <a:ext uri="{FF2B5EF4-FFF2-40B4-BE49-F238E27FC236}">
-                <a16:creationId xmlns:a16="http://schemas.microsoft.com/office/drawing/2014/main" id="{0354C6C2-33DA-0102-6360-654F993BD701}"/>
-              </a:ext>
-            </a:extLst>
-          </p:cNvPr>
+            <a:endParaRPr lang="en-US" dirty="0"/>
+          </a:p>
+        </p:txBody>
+      </p:sp>
+      <p:sp>
+        <p:nvSpPr>
+          <p:cNvPr id="3" name="Content Placeholder 2"/>
           <p:cNvSpPr>
             <a:spLocks noGrp="1"/>
           </p:cNvSpPr>
@@ -1276,8 +1126,8 @@
         </p:nvSpPr>
         <p:spPr>
           <a:xfrm>
-            <a:off x="838200" y="1825625"/>
-            <a:ext cx="5181600" cy="4351338"/>
+            <a:off x="628650" y="1825625"/>
+            <a:ext cx="3886200" cy="4351338"/>
           </a:xfrm>
         </p:spPr>
         <p:txBody>
@@ -1317,18 +1167,13 @@
               <a:rPr lang="en-US"/>
               <a:t>Fifth level</a:t>
             </a:r>
-          </a:p>
-        </p:txBody>
-      </p:sp>
-      <p:sp>
-        <p:nvSpPr>
-          <p:cNvPr id="4" name="Content Placeholder 3">
-            <a:extLst>
-              <a:ext uri="{FF2B5EF4-FFF2-40B4-BE49-F238E27FC236}">
-                <a16:creationId xmlns:a16="http://schemas.microsoft.com/office/drawing/2014/main" id="{EE2B2A58-052B-B454-9932-012243039D08}"/>
-              </a:ext>
-            </a:extLst>
-          </p:cNvPr>
+            <a:endParaRPr lang="en-US" dirty="0"/>
+          </a:p>
+        </p:txBody>
+      </p:sp>
+      <p:sp>
+        <p:nvSpPr>
+          <p:cNvPr id="4" name="Content Placeholder 3"/>
           <p:cNvSpPr>
             <a:spLocks noGrp="1"/>
           </p:cNvSpPr>
@@ -1338,8 +1183,8 @@
         </p:nvSpPr>
         <p:spPr>
           <a:xfrm>
-            <a:off x="6172200" y="1825625"/>
-            <a:ext cx="5181600" cy="4351338"/>
+            <a:off x="4629150" y="1825625"/>
+            <a:ext cx="3886200" cy="4351338"/>
           </a:xfrm>
         </p:spPr>
         <p:txBody>
@@ -1379,18 +1224,13 @@
               <a:rPr lang="en-US"/>
               <a:t>Fifth level</a:t>
             </a:r>
-          </a:p>
-        </p:txBody>
-      </p:sp>
-      <p:sp>
-        <p:nvSpPr>
-          <p:cNvPr id="5" name="Date Placeholder 4">
-            <a:extLst>
-              <a:ext uri="{FF2B5EF4-FFF2-40B4-BE49-F238E27FC236}">
-                <a16:creationId xmlns:a16="http://schemas.microsoft.com/office/drawing/2014/main" id="{52B92D04-ECBD-D55F-A459-4C28DF6A8C2E}"/>
-              </a:ext>
-            </a:extLst>
-          </p:cNvPr>
+            <a:endParaRPr lang="en-US" dirty="0"/>
+          </a:p>
+        </p:txBody>
+      </p:sp>
+      <p:sp>
+        <p:nvSpPr>
+          <p:cNvPr id="5" name="Date Placeholder 4"/>
           <p:cNvSpPr>
             <a:spLocks noGrp="1"/>
           </p:cNvSpPr>
@@ -1405,7 +1245,7 @@
           <a:p>
             <a:fld id="{E759A0DE-F190-5444-87AC-4719D5F20D15}" type="datetimeFigureOut">
               <a:rPr lang="en-US" smtClean="0"/>
-              <a:t>6/10/26</a:t>
+              <a:t>6/13/26</a:t>
             </a:fld>
             <a:endParaRPr lang="en-US"/>
           </a:p>
@@ -1413,13 +1253,7 @@
       </p:sp>
       <p:sp>
         <p:nvSpPr>
-          <p:cNvPr id="6" name="Footer Placeholder 5">
-            <a:extLst>
-              <a:ext uri="{FF2B5EF4-FFF2-40B4-BE49-F238E27FC236}">
-                <a16:creationId xmlns:a16="http://schemas.microsoft.com/office/drawing/2014/main" id="{DF69ACAC-11AF-A864-BD18-A4B426A4AA03}"/>
-              </a:ext>
-            </a:extLst>
-          </p:cNvPr>
+          <p:cNvPr id="6" name="Footer Placeholder 5"/>
           <p:cNvSpPr>
             <a:spLocks noGrp="1"/>
           </p:cNvSpPr>
@@ -1438,13 +1272,7 @@
       </p:sp>
       <p:sp>
         <p:nvSpPr>
-          <p:cNvPr id="7" name="Slide Number Placeholder 6">
-            <a:extLst>
-              <a:ext uri="{FF2B5EF4-FFF2-40B4-BE49-F238E27FC236}">
-                <a16:creationId xmlns:a16="http://schemas.microsoft.com/office/drawing/2014/main" id="{3A3C5DAC-E196-CEC3-6A6B-376BB3F37D19}"/>
-              </a:ext>
-            </a:extLst>
-          </p:cNvPr>
+          <p:cNvPr id="7" name="Slide Number Placeholder 6"/>
           <p:cNvSpPr>
             <a:spLocks noGrp="1"/>
           </p:cNvSpPr>
@@ -1468,7 +1296,7 @@
     </p:spTree>
     <p:extLst>
       <p:ext uri="{BB962C8B-B14F-4D97-AF65-F5344CB8AC3E}">
-        <p14:creationId xmlns:p14="http://schemas.microsoft.com/office/powerpoint/2010/main" val="621302458"/>
+        <p14:creationId xmlns:p14="http://schemas.microsoft.com/office/powerpoint/2010/main" val="2120275962"/>
       </p:ext>
     </p:extLst>
   </p:cSld>
@@ -1497,13 +1325,7 @@
       </p:grpSpPr>
       <p:sp>
         <p:nvSpPr>
-          <p:cNvPr id="2" name="Title 1">
-            <a:extLst>
-              <a:ext uri="{FF2B5EF4-FFF2-40B4-BE49-F238E27FC236}">
-                <a16:creationId xmlns:a16="http://schemas.microsoft.com/office/drawing/2014/main" id="{0C632820-190D-235F-CEAA-9558C5413BC1}"/>
-              </a:ext>
-            </a:extLst>
-          </p:cNvPr>
+          <p:cNvPr id="2" name="Title 1"/>
           <p:cNvSpPr>
             <a:spLocks noGrp="1"/>
           </p:cNvSpPr>
@@ -1513,8 +1335,8 @@
         </p:nvSpPr>
         <p:spPr>
           <a:xfrm>
-            <a:off x="839788" y="365125"/>
-            <a:ext cx="10515600" cy="1325563"/>
+            <a:off x="629841" y="365126"/>
+            <a:ext cx="7886700" cy="1325563"/>
           </a:xfrm>
         </p:spPr>
         <p:txBody>
@@ -1525,18 +1347,13 @@
               <a:rPr lang="en-US"/>
               <a:t>Click to edit Master title style</a:t>
             </a:r>
-          </a:p>
-        </p:txBody>
-      </p:sp>
-      <p:sp>
-        <p:nvSpPr>
-          <p:cNvPr id="3" name="Text Placeholder 2">
-            <a:extLst>
-              <a:ext uri="{FF2B5EF4-FFF2-40B4-BE49-F238E27FC236}">
-                <a16:creationId xmlns:a16="http://schemas.microsoft.com/office/drawing/2014/main" id="{16693254-6651-D942-4099-84C9B6A31CF3}"/>
-              </a:ext>
-            </a:extLst>
-          </p:cNvPr>
+            <a:endParaRPr lang="en-US" dirty="0"/>
+          </a:p>
+        </p:txBody>
+      </p:sp>
+      <p:sp>
+        <p:nvSpPr>
+          <p:cNvPr id="3" name="Text Placeholder 2"/>
           <p:cNvSpPr>
             <a:spLocks noGrp="1"/>
           </p:cNvSpPr>
@@ -1546,8 +1363,8 @@
         </p:nvSpPr>
         <p:spPr>
           <a:xfrm>
-            <a:off x="839788" y="1681163"/>
-            <a:ext cx="5157787" cy="823912"/>
+            <a:off x="629842" y="1681163"/>
+            <a:ext cx="3868340" cy="823912"/>
           </a:xfrm>
         </p:spPr>
         <p:txBody>
@@ -1601,13 +1418,7 @@
       </p:sp>
       <p:sp>
         <p:nvSpPr>
-          <p:cNvPr id="4" name="Content Placeholder 3">
-            <a:extLst>
-              <a:ext uri="{FF2B5EF4-FFF2-40B4-BE49-F238E27FC236}">
-                <a16:creationId xmlns:a16="http://schemas.microsoft.com/office/drawing/2014/main" id="{D6D4DAC3-CF47-11DC-83E8-0B1192A4422A}"/>
-              </a:ext>
-            </a:extLst>
-          </p:cNvPr>
+          <p:cNvPr id="4" name="Content Placeholder 3"/>
           <p:cNvSpPr>
             <a:spLocks noGrp="1"/>
           </p:cNvSpPr>
@@ -1617,8 +1428,8 @@
         </p:nvSpPr>
         <p:spPr>
           <a:xfrm>
-            <a:off x="839788" y="2505075"/>
-            <a:ext cx="5157787" cy="3684588"/>
+            <a:off x="629842" y="2505075"/>
+            <a:ext cx="3868340" cy="3684588"/>
           </a:xfrm>
         </p:spPr>
         <p:txBody>
@@ -1658,18 +1469,13 @@
               <a:rPr lang="en-US"/>
               <a:t>Fifth level</a:t>
             </a:r>
-          </a:p>
-        </p:txBody>
-      </p:sp>
-      <p:sp>
-        <p:nvSpPr>
-          <p:cNvPr id="5" name="Text Placeholder 4">
-            <a:extLst>
-              <a:ext uri="{FF2B5EF4-FFF2-40B4-BE49-F238E27FC236}">
-                <a16:creationId xmlns:a16="http://schemas.microsoft.com/office/drawing/2014/main" id="{3C49067B-AD0F-C796-4C8F-C043DB6FD3B3}"/>
-              </a:ext>
-            </a:extLst>
-          </p:cNvPr>
+            <a:endParaRPr lang="en-US" dirty="0"/>
+          </a:p>
+        </p:txBody>
+      </p:sp>
+      <p:sp>
+        <p:nvSpPr>
+          <p:cNvPr id="5" name="Text Placeholder 4"/>
           <p:cNvSpPr>
             <a:spLocks noGrp="1"/>
           </p:cNvSpPr>
@@ -1679,8 +1485,8 @@
         </p:nvSpPr>
         <p:spPr>
           <a:xfrm>
-            <a:off x="6172200" y="1681163"/>
-            <a:ext cx="5183188" cy="823912"/>
+            <a:off x="4629150" y="1681163"/>
+            <a:ext cx="3887391" cy="823912"/>
           </a:xfrm>
         </p:spPr>
         <p:txBody>
@@ -1734,13 +1540,7 @@
       </p:sp>
       <p:sp>
         <p:nvSpPr>
-          <p:cNvPr id="6" name="Content Placeholder 5">
-            <a:extLst>
-              <a:ext uri="{FF2B5EF4-FFF2-40B4-BE49-F238E27FC236}">
-                <a16:creationId xmlns:a16="http://schemas.microsoft.com/office/drawing/2014/main" id="{A4D0695B-675B-E8DD-D931-29E639B3E559}"/>
-              </a:ext>
-            </a:extLst>
-          </p:cNvPr>
+          <p:cNvPr id="6" name="Content Placeholder 5"/>
           <p:cNvSpPr>
             <a:spLocks noGrp="1"/>
           </p:cNvSpPr>
@@ -1750,8 +1550,8 @@
         </p:nvSpPr>
         <p:spPr>
           <a:xfrm>
-            <a:off x="6172200" y="2505075"/>
-            <a:ext cx="5183188" cy="3684588"/>
+            <a:off x="4629150" y="2505075"/>
+            <a:ext cx="3887391" cy="3684588"/>
           </a:xfrm>
         </p:spPr>
         <p:txBody>
@@ -1791,18 +1591,13 @@
               <a:rPr lang="en-US"/>
               <a:t>Fifth level</a:t>
             </a:r>
-          </a:p>
-        </p:txBody>
-      </p:sp>
-      <p:sp>
-        <p:nvSpPr>
-          <p:cNvPr id="7" name="Date Placeholder 6">
-            <a:extLst>
-              <a:ext uri="{FF2B5EF4-FFF2-40B4-BE49-F238E27FC236}">
-                <a16:creationId xmlns:a16="http://schemas.microsoft.com/office/drawing/2014/main" id="{E7F5423C-A80C-353A-6ADA-AD2195CCE83B}"/>
-              </a:ext>
-            </a:extLst>
-          </p:cNvPr>
+            <a:endParaRPr lang="en-US" dirty="0"/>
+          </a:p>
+        </p:txBody>
+      </p:sp>
+      <p:sp>
+        <p:nvSpPr>
+          <p:cNvPr id="7" name="Date Placeholder 6"/>
           <p:cNvSpPr>
             <a:spLocks noGrp="1"/>
           </p:cNvSpPr>
@@ -1817,7 +1612,7 @@
           <a:p>
             <a:fld id="{E759A0DE-F190-5444-87AC-4719D5F20D15}" type="datetimeFigureOut">
               <a:rPr lang="en-US" smtClean="0"/>
-              <a:t>6/10/26</a:t>
+              <a:t>6/13/26</a:t>
             </a:fld>
             <a:endParaRPr lang="en-US"/>
           </a:p>
@@ -1825,13 +1620,7 @@
       </p:sp>
       <p:sp>
         <p:nvSpPr>
-          <p:cNvPr id="8" name="Footer Placeholder 7">
-            <a:extLst>
-              <a:ext uri="{FF2B5EF4-FFF2-40B4-BE49-F238E27FC236}">
-                <a16:creationId xmlns:a16="http://schemas.microsoft.com/office/drawing/2014/main" id="{3154C085-1B7B-06F2-2F97-8BE5AED3D908}"/>
-              </a:ext>
-            </a:extLst>
-          </p:cNvPr>
+          <p:cNvPr id="8" name="Footer Placeholder 7"/>
           <p:cNvSpPr>
             <a:spLocks noGrp="1"/>
           </p:cNvSpPr>
@@ -1850,13 +1639,7 @@
       </p:sp>
       <p:sp>
         <p:nvSpPr>
-          <p:cNvPr id="9" name="Slide Number Placeholder 8">
-            <a:extLst>
-              <a:ext uri="{FF2B5EF4-FFF2-40B4-BE49-F238E27FC236}">
-                <a16:creationId xmlns:a16="http://schemas.microsoft.com/office/drawing/2014/main" id="{A6C6B0A2-57CB-16B8-1E9B-CA6DA6337B35}"/>
-              </a:ext>
-            </a:extLst>
-          </p:cNvPr>
+          <p:cNvPr id="9" name="Slide Number Placeholder 8"/>
           <p:cNvSpPr>
             <a:spLocks noGrp="1"/>
           </p:cNvSpPr>
@@ -1880,7 +1663,7 @@
     </p:spTree>
     <p:extLst>
       <p:ext uri="{BB962C8B-B14F-4D97-AF65-F5344CB8AC3E}">
-        <p14:creationId xmlns:p14="http://schemas.microsoft.com/office/powerpoint/2010/main" val="3902579014"/>
+        <p14:creationId xmlns:p14="http://schemas.microsoft.com/office/powerpoint/2010/main" val="3458719147"/>
       </p:ext>
     </p:extLst>
   </p:cSld>
@@ -1909,13 +1692,7 @@
       </p:grpSpPr>
       <p:sp>
         <p:nvSpPr>
-          <p:cNvPr id="2" name="Title 1">
-            <a:extLst>
-              <a:ext uri="{FF2B5EF4-FFF2-40B4-BE49-F238E27FC236}">
-                <a16:creationId xmlns:a16="http://schemas.microsoft.com/office/drawing/2014/main" id="{42014C2D-A9C6-E4FF-86E0-53926609620A}"/>
-              </a:ext>
-            </a:extLst>
-          </p:cNvPr>
+          <p:cNvPr id="2" name="Title 1"/>
           <p:cNvSpPr>
             <a:spLocks noGrp="1"/>
           </p:cNvSpPr>
@@ -1932,18 +1709,13 @@
               <a:rPr lang="en-US"/>
               <a:t>Click to edit Master title style</a:t>
             </a:r>
-          </a:p>
-        </p:txBody>
-      </p:sp>
-      <p:sp>
-        <p:nvSpPr>
-          <p:cNvPr id="3" name="Date Placeholder 2">
-            <a:extLst>
-              <a:ext uri="{FF2B5EF4-FFF2-40B4-BE49-F238E27FC236}">
-                <a16:creationId xmlns:a16="http://schemas.microsoft.com/office/drawing/2014/main" id="{CAEBDED3-8FA2-E14E-6132-DBF06C0043E9}"/>
-              </a:ext>
-            </a:extLst>
-          </p:cNvPr>
+            <a:endParaRPr lang="en-US" dirty="0"/>
+          </a:p>
+        </p:txBody>
+      </p:sp>
+      <p:sp>
+        <p:nvSpPr>
+          <p:cNvPr id="3" name="Date Placeholder 2"/>
           <p:cNvSpPr>
             <a:spLocks noGrp="1"/>
           </p:cNvSpPr>
@@ -1958,7 +1730,7 @@
           <a:p>
             <a:fld id="{E759A0DE-F190-5444-87AC-4719D5F20D15}" type="datetimeFigureOut">
               <a:rPr lang="en-US" smtClean="0"/>
-              <a:t>6/10/26</a:t>
+              <a:t>6/13/26</a:t>
             </a:fld>
             <a:endParaRPr lang="en-US"/>
           </a:p>
@@ -1966,13 +1738,7 @@
       </p:sp>
       <p:sp>
         <p:nvSpPr>
-          <p:cNvPr id="4" name="Footer Placeholder 3">
-            <a:extLst>
-              <a:ext uri="{FF2B5EF4-FFF2-40B4-BE49-F238E27FC236}">
-                <a16:creationId xmlns:a16="http://schemas.microsoft.com/office/drawing/2014/main" id="{24FF1715-78D0-6155-47B7-64F32ECF5F55}"/>
-              </a:ext>
-            </a:extLst>
-          </p:cNvPr>
+          <p:cNvPr id="4" name="Footer Placeholder 3"/>
           <p:cNvSpPr>
             <a:spLocks noGrp="1"/>
           </p:cNvSpPr>
@@ -1991,13 +1757,7 @@
       </p:sp>
       <p:sp>
         <p:nvSpPr>
-          <p:cNvPr id="5" name="Slide Number Placeholder 4">
-            <a:extLst>
-              <a:ext uri="{FF2B5EF4-FFF2-40B4-BE49-F238E27FC236}">
-                <a16:creationId xmlns:a16="http://schemas.microsoft.com/office/drawing/2014/main" id="{95EE70D1-30EB-D2A6-F6C0-29E5A0681277}"/>
-              </a:ext>
-            </a:extLst>
-          </p:cNvPr>
+          <p:cNvPr id="5" name="Slide Number Placeholder 4"/>
           <p:cNvSpPr>
             <a:spLocks noGrp="1"/>
           </p:cNvSpPr>
@@ -2021,7 +1781,7 @@
     </p:spTree>
     <p:extLst>
       <p:ext uri="{BB962C8B-B14F-4D97-AF65-F5344CB8AC3E}">
-        <p14:creationId xmlns:p14="http://schemas.microsoft.com/office/powerpoint/2010/main" val="2762667879"/>
+        <p14:creationId xmlns:p14="http://schemas.microsoft.com/office/powerpoint/2010/main" val="337610149"/>
       </p:ext>
     </p:extLst>
   </p:cSld>
@@ -2050,13 +1810,7 @@
       </p:grpSpPr>
       <p:sp>
         <p:nvSpPr>
-          <p:cNvPr id="2" name="Date Placeholder 1">
-            <a:extLst>
-              <a:ext uri="{FF2B5EF4-FFF2-40B4-BE49-F238E27FC236}">
-                <a16:creationId xmlns:a16="http://schemas.microsoft.com/office/drawing/2014/main" id="{9CD2DAB5-6AD5-15BC-026B-B80E34678399}"/>
-              </a:ext>
-            </a:extLst>
-          </p:cNvPr>
+          <p:cNvPr id="2" name="Date Placeholder 1"/>
           <p:cNvSpPr>
             <a:spLocks noGrp="1"/>
           </p:cNvSpPr>
@@ -2071,7 +1825,7 @@
           <a:p>
             <a:fld id="{E759A0DE-F190-5444-87AC-4719D5F20D15}" type="datetimeFigureOut">
               <a:rPr lang="en-US" smtClean="0"/>
-              <a:t>6/10/26</a:t>
+              <a:t>6/13/26</a:t>
             </a:fld>
             <a:endParaRPr lang="en-US"/>
           </a:p>
@@ -2079,13 +1833,7 @@
       </p:sp>
       <p:sp>
         <p:nvSpPr>
-          <p:cNvPr id="3" name="Footer Placeholder 2">
-            <a:extLst>
-              <a:ext uri="{FF2B5EF4-FFF2-40B4-BE49-F238E27FC236}">
-                <a16:creationId xmlns:a16="http://schemas.microsoft.com/office/drawing/2014/main" id="{919D2783-D2E4-47AE-70D6-B4A209E13CBC}"/>
-              </a:ext>
-            </a:extLst>
-          </p:cNvPr>
+          <p:cNvPr id="3" name="Footer Placeholder 2"/>
           <p:cNvSpPr>
             <a:spLocks noGrp="1"/>
           </p:cNvSpPr>
@@ -2104,13 +1852,7 @@
       </p:sp>
       <p:sp>
         <p:nvSpPr>
-          <p:cNvPr id="4" name="Slide Number Placeholder 3">
-            <a:extLst>
-              <a:ext uri="{FF2B5EF4-FFF2-40B4-BE49-F238E27FC236}">
-                <a16:creationId xmlns:a16="http://schemas.microsoft.com/office/drawing/2014/main" id="{009A41F5-9D51-17BE-FB49-C0DC79F1FB33}"/>
-              </a:ext>
-            </a:extLst>
-          </p:cNvPr>
+          <p:cNvPr id="4" name="Slide Number Placeholder 3"/>
           <p:cNvSpPr>
             <a:spLocks noGrp="1"/>
           </p:cNvSpPr>
@@ -2134,7 +1876,7 @@
     </p:spTree>
     <p:extLst>
       <p:ext uri="{BB962C8B-B14F-4D97-AF65-F5344CB8AC3E}">
-        <p14:creationId xmlns:p14="http://schemas.microsoft.com/office/powerpoint/2010/main" val="684399818"/>
+        <p14:creationId xmlns:p14="http://schemas.microsoft.com/office/powerpoint/2010/main" val="3955326277"/>
       </p:ext>
     </p:extLst>
   </p:cSld>
@@ -2163,13 +1905,7 @@
       </p:grpSpPr>
       <p:sp>
         <p:nvSpPr>
-          <p:cNvPr id="2" name="Title 1">
-            <a:extLst>
-              <a:ext uri="{FF2B5EF4-FFF2-40B4-BE49-F238E27FC236}">
-                <a16:creationId xmlns:a16="http://schemas.microsoft.com/office/drawing/2014/main" id="{636535ED-82D6-0936-3EEB-AD9435F5EDC9}"/>
-              </a:ext>
-            </a:extLst>
-          </p:cNvPr>
+          <p:cNvPr id="2" name="Title 1"/>
           <p:cNvSpPr>
             <a:spLocks noGrp="1"/>
           </p:cNvSpPr>
@@ -2179,8 +1915,8 @@
         </p:nvSpPr>
         <p:spPr>
           <a:xfrm>
-            <a:off x="839788" y="457200"/>
-            <a:ext cx="3932237" cy="1600200"/>
+            <a:off x="629841" y="457200"/>
+            <a:ext cx="2949178" cy="1600200"/>
           </a:xfrm>
         </p:spPr>
         <p:txBody>
@@ -2195,18 +1931,13 @@
               <a:rPr lang="en-US"/>
               <a:t>Click to edit Master title style</a:t>
             </a:r>
-          </a:p>
-        </p:txBody>
-      </p:sp>
-      <p:sp>
-        <p:nvSpPr>
-          <p:cNvPr id="3" name="Content Placeholder 2">
-            <a:extLst>
-              <a:ext uri="{FF2B5EF4-FFF2-40B4-BE49-F238E27FC236}">
-                <a16:creationId xmlns:a16="http://schemas.microsoft.com/office/drawing/2014/main" id="{1803B2A4-A7AB-CDB0-D7F1-279536A2702A}"/>
-              </a:ext>
-            </a:extLst>
-          </p:cNvPr>
+            <a:endParaRPr lang="en-US" dirty="0"/>
+          </a:p>
+        </p:txBody>
+      </p:sp>
+      <p:sp>
+        <p:nvSpPr>
+          <p:cNvPr id="3" name="Content Placeholder 2"/>
           <p:cNvSpPr>
             <a:spLocks noGrp="1"/>
           </p:cNvSpPr>
@@ -2216,8 +1947,8 @@
         </p:nvSpPr>
         <p:spPr>
           <a:xfrm>
-            <a:off x="5183188" y="987425"/>
-            <a:ext cx="6172200" cy="4873625"/>
+            <a:off x="3887391" y="987426"/>
+            <a:ext cx="4629150" cy="4873625"/>
           </a:xfrm>
         </p:spPr>
         <p:txBody>
@@ -2285,18 +2016,13 @@
               <a:rPr lang="en-US"/>
               <a:t>Fifth level</a:t>
             </a:r>
-          </a:p>
-        </p:txBody>
-      </p:sp>
-      <p:sp>
-        <p:nvSpPr>
-          <p:cNvPr id="4" name="Text Placeholder 3">
-            <a:extLst>
-              <a:ext uri="{FF2B5EF4-FFF2-40B4-BE49-F238E27FC236}">
-                <a16:creationId xmlns:a16="http://schemas.microsoft.com/office/drawing/2014/main" id="{3329566A-3ACC-2A16-1AAE-6B0281DB7E3C}"/>
-              </a:ext>
-            </a:extLst>
-          </p:cNvPr>
+            <a:endParaRPr lang="en-US" dirty="0"/>
+          </a:p>
+        </p:txBody>
+      </p:sp>
+      <p:sp>
+        <p:nvSpPr>
+          <p:cNvPr id="4" name="Text Placeholder 3"/>
           <p:cNvSpPr>
             <a:spLocks noGrp="1"/>
           </p:cNvSpPr>
@@ -2306,8 +2032,8 @@
         </p:nvSpPr>
         <p:spPr>
           <a:xfrm>
-            <a:off x="839788" y="2057400"/>
-            <a:ext cx="3932237" cy="3811588"/>
+            <a:off x="629841" y="2057400"/>
+            <a:ext cx="2949178" cy="3811588"/>
           </a:xfrm>
         </p:spPr>
         <p:txBody>
@@ -2361,13 +2087,7 @@
       </p:sp>
       <p:sp>
         <p:nvSpPr>
-          <p:cNvPr id="5" name="Date Placeholder 4">
-            <a:extLst>
-              <a:ext uri="{FF2B5EF4-FFF2-40B4-BE49-F238E27FC236}">
-                <a16:creationId xmlns:a16="http://schemas.microsoft.com/office/drawing/2014/main" id="{453518F2-2B74-8F2D-171A-15986F3C5152}"/>
-              </a:ext>
-            </a:extLst>
-          </p:cNvPr>
+          <p:cNvPr id="5" name="Date Placeholder 4"/>
           <p:cNvSpPr>
             <a:spLocks noGrp="1"/>
           </p:cNvSpPr>
@@ -2382,7 +2102,7 @@
           <a:p>
             <a:fld id="{E759A0DE-F190-5444-87AC-4719D5F20D15}" type="datetimeFigureOut">
               <a:rPr lang="en-US" smtClean="0"/>
-              <a:t>6/10/26</a:t>
+              <a:t>6/13/26</a:t>
             </a:fld>
             <a:endParaRPr lang="en-US"/>
           </a:p>
@@ -2390,13 +2110,7 @@
       </p:sp>
       <p:sp>
         <p:nvSpPr>
-          <p:cNvPr id="6" name="Footer Placeholder 5">
-            <a:extLst>
-              <a:ext uri="{FF2B5EF4-FFF2-40B4-BE49-F238E27FC236}">
-                <a16:creationId xmlns:a16="http://schemas.microsoft.com/office/drawing/2014/main" id="{6DF8701B-4899-C3D0-CB2F-6C31378A510F}"/>
-              </a:ext>
-            </a:extLst>
-          </p:cNvPr>
+          <p:cNvPr id="6" name="Footer Placeholder 5"/>
           <p:cNvSpPr>
             <a:spLocks noGrp="1"/>
           </p:cNvSpPr>
@@ -2415,13 +2129,7 @@
       </p:sp>
       <p:sp>
         <p:nvSpPr>
-          <p:cNvPr id="7" name="Slide Number Placeholder 6">
-            <a:extLst>
-              <a:ext uri="{FF2B5EF4-FFF2-40B4-BE49-F238E27FC236}">
-                <a16:creationId xmlns:a16="http://schemas.microsoft.com/office/drawing/2014/main" id="{F3240FD0-A8F8-EFCD-2A69-21AB0FB076F6}"/>
-              </a:ext>
-            </a:extLst>
-          </p:cNvPr>
+          <p:cNvPr id="7" name="Slide Number Placeholder 6"/>
           <p:cNvSpPr>
             <a:spLocks noGrp="1"/>
           </p:cNvSpPr>
@@ -2445,7 +2153,7 @@
     </p:spTree>
     <p:extLst>
       <p:ext uri="{BB962C8B-B14F-4D97-AF65-F5344CB8AC3E}">
-        <p14:creationId xmlns:p14="http://schemas.microsoft.com/office/powerpoint/2010/main" val="2191778824"/>
+        <p14:creationId xmlns:p14="http://schemas.microsoft.com/office/powerpoint/2010/main" val="3914498153"/>
       </p:ext>
     </p:extLst>
   </p:cSld>
@@ -2474,13 +2182,7 @@
       </p:grpSpPr>
       <p:sp>
         <p:nvSpPr>
-          <p:cNvPr id="2" name="Title 1">
-            <a:extLst>
-              <a:ext uri="{FF2B5EF4-FFF2-40B4-BE49-F238E27FC236}">
-                <a16:creationId xmlns:a16="http://schemas.microsoft.com/office/drawing/2014/main" id="{FD43467F-CDAF-BF3C-2E6D-F2EBB52C7E17}"/>
-              </a:ext>
-            </a:extLst>
-          </p:cNvPr>
+          <p:cNvPr id="2" name="Title 1"/>
           <p:cNvSpPr>
             <a:spLocks noGrp="1"/>
           </p:cNvSpPr>
@@ -2490,8 +2192,8 @@
         </p:nvSpPr>
         <p:spPr>
           <a:xfrm>
-            <a:off x="839788" y="457200"/>
-            <a:ext cx="3932237" cy="1600200"/>
+            <a:off x="629841" y="457200"/>
+            <a:ext cx="2949178" cy="1600200"/>
           </a:xfrm>
         </p:spPr>
         <p:txBody>
@@ -2506,20 +2208,15 @@
               <a:rPr lang="en-US"/>
               <a:t>Click to edit Master title style</a:t>
             </a:r>
-          </a:p>
-        </p:txBody>
-      </p:sp>
-      <p:sp>
-        <p:nvSpPr>
-          <p:cNvPr id="3" name="Picture Placeholder 2">
-            <a:extLst>
-              <a:ext uri="{FF2B5EF4-FFF2-40B4-BE49-F238E27FC236}">
-                <a16:creationId xmlns:a16="http://schemas.microsoft.com/office/drawing/2014/main" id="{63D374E6-7653-1FED-90D8-27F8F5A5A555}"/>
-              </a:ext>
-            </a:extLst>
-          </p:cNvPr>
-          <p:cNvSpPr>
-            <a:spLocks noGrp="1"/>
+            <a:endParaRPr lang="en-US" dirty="0"/>
+          </a:p>
+        </p:txBody>
+      </p:sp>
+      <p:sp>
+        <p:nvSpPr>
+          <p:cNvPr id="3" name="Picture Placeholder 2"/>
+          <p:cNvSpPr>
+            <a:spLocks noGrp="1" noChangeAspect="1"/>
           </p:cNvSpPr>
           <p:nvPr>
             <p:ph type="pic" idx="1"/>
@@ -2527,12 +2224,12 @@
         </p:nvSpPr>
         <p:spPr>
           <a:xfrm>
-            <a:off x="5183188" y="987425"/>
-            <a:ext cx="6172200" cy="4873625"/>
+            <a:off x="3887391" y="987426"/>
+            <a:ext cx="4629150" cy="4873625"/>
           </a:xfrm>
         </p:spPr>
         <p:txBody>
-          <a:bodyPr/>
+          <a:bodyPr anchor="t"/>
           <a:lstStyle>
             <a:lvl1pPr marL="0" indent="0">
               <a:buNone/>
@@ -2572,19 +2269,17 @@
             </a:lvl9pPr>
           </a:lstStyle>
           <a:p>
-            <a:endParaRPr lang="en-US"/>
-          </a:p>
-        </p:txBody>
-      </p:sp>
-      <p:sp>
-        <p:nvSpPr>
-          <p:cNvPr id="4" name="Text Placeholder 3">
-            <a:extLst>
-              <a:ext uri="{FF2B5EF4-FFF2-40B4-BE49-F238E27FC236}">
-                <a16:creationId xmlns:a16="http://schemas.microsoft.com/office/drawing/2014/main" id="{9318631D-B68A-86EE-A551-F2FE300250A2}"/>
-              </a:ext>
-            </a:extLst>
-          </p:cNvPr>
+            <a:r>
+              <a:rPr lang="en-US"/>
+              <a:t>Click icon to add picture</a:t>
+            </a:r>
+            <a:endParaRPr lang="en-US" dirty="0"/>
+          </a:p>
+        </p:txBody>
+      </p:sp>
+      <p:sp>
+        <p:nvSpPr>
+          <p:cNvPr id="4" name="Text Placeholder 3"/>
           <p:cNvSpPr>
             <a:spLocks noGrp="1"/>
           </p:cNvSpPr>
@@ -2594,8 +2289,8 @@
         </p:nvSpPr>
         <p:spPr>
           <a:xfrm>
-            <a:off x="839788" y="2057400"/>
-            <a:ext cx="3932237" cy="3811588"/>
+            <a:off x="629841" y="2057400"/>
+            <a:ext cx="2949178" cy="3811588"/>
           </a:xfrm>
         </p:spPr>
         <p:txBody>
@@ -2649,13 +2344,7 @@
       </p:sp>
       <p:sp>
         <p:nvSpPr>
-          <p:cNvPr id="5" name="Date Placeholder 4">
-            <a:extLst>
-              <a:ext uri="{FF2B5EF4-FFF2-40B4-BE49-F238E27FC236}">
-                <a16:creationId xmlns:a16="http://schemas.microsoft.com/office/drawing/2014/main" id="{0CAD5574-CD0C-0EDC-7EA2-BBDDAA07AD36}"/>
-              </a:ext>
-            </a:extLst>
-          </p:cNvPr>
+          <p:cNvPr id="5" name="Date Placeholder 4"/>
           <p:cNvSpPr>
             <a:spLocks noGrp="1"/>
           </p:cNvSpPr>
@@ -2670,7 +2359,7 @@
           <a:p>
             <a:fld id="{E759A0DE-F190-5444-87AC-4719D5F20D15}" type="datetimeFigureOut">
               <a:rPr lang="en-US" smtClean="0"/>
-              <a:t>6/10/26</a:t>
+              <a:t>6/13/26</a:t>
             </a:fld>
             <a:endParaRPr lang="en-US"/>
           </a:p>
@@ -2678,13 +2367,7 @@
       </p:sp>
       <p:sp>
         <p:nvSpPr>
-          <p:cNvPr id="6" name="Footer Placeholder 5">
-            <a:extLst>
-              <a:ext uri="{FF2B5EF4-FFF2-40B4-BE49-F238E27FC236}">
-                <a16:creationId xmlns:a16="http://schemas.microsoft.com/office/drawing/2014/main" id="{C4ADA4F2-15B1-95FF-AFC8-0BCFB4E4E788}"/>
-              </a:ext>
-            </a:extLst>
-          </p:cNvPr>
+          <p:cNvPr id="6" name="Footer Placeholder 5"/>
           <p:cNvSpPr>
             <a:spLocks noGrp="1"/>
           </p:cNvSpPr>
@@ -2703,13 +2386,7 @@
       </p:sp>
       <p:sp>
         <p:nvSpPr>
-          <p:cNvPr id="7" name="Slide Number Placeholder 6">
-            <a:extLst>
-              <a:ext uri="{FF2B5EF4-FFF2-40B4-BE49-F238E27FC236}">
-                <a16:creationId xmlns:a16="http://schemas.microsoft.com/office/drawing/2014/main" id="{5F57356D-53C5-30FE-E0FE-A480BE6A8E8C}"/>
-              </a:ext>
-            </a:extLst>
-          </p:cNvPr>
+          <p:cNvPr id="7" name="Slide Number Placeholder 6"/>
           <p:cNvSpPr>
             <a:spLocks noGrp="1"/>
           </p:cNvSpPr>
@@ -2733,7 +2410,7 @@
     </p:spTree>
     <p:extLst>
       <p:ext uri="{BB962C8B-B14F-4D97-AF65-F5344CB8AC3E}">
-        <p14:creationId xmlns:p14="http://schemas.microsoft.com/office/powerpoint/2010/main" val="3139710704"/>
+        <p14:creationId xmlns:p14="http://schemas.microsoft.com/office/powerpoint/2010/main" val="3657460948"/>
       </p:ext>
     </p:extLst>
   </p:cSld>
@@ -2767,13 +2444,7 @@
       </p:grpSpPr>
       <p:sp>
         <p:nvSpPr>
-          <p:cNvPr id="2" name="Title Placeholder 1">
-            <a:extLst>
-              <a:ext uri="{FF2B5EF4-FFF2-40B4-BE49-F238E27FC236}">
-                <a16:creationId xmlns:a16="http://schemas.microsoft.com/office/drawing/2014/main" id="{E707FE23-AD5C-E492-4625-B3FFD7D65D58}"/>
-              </a:ext>
-            </a:extLst>
-          </p:cNvPr>
+          <p:cNvPr id="2" name="Title Placeholder 1"/>
           <p:cNvSpPr>
             <a:spLocks noGrp="1"/>
           </p:cNvSpPr>
@@ -2783,8 +2454,8 @@
         </p:nvSpPr>
         <p:spPr>
           <a:xfrm>
-            <a:off x="838200" y="365125"/>
-            <a:ext cx="10515600" cy="1325563"/>
+            <a:off x="628650" y="365126"/>
+            <a:ext cx="7886700" cy="1325563"/>
           </a:xfrm>
           <a:prstGeom prst="rect">
             <a:avLst/>
@@ -2800,18 +2471,13 @@
               <a:rPr lang="en-US"/>
               <a:t>Click to edit Master title style</a:t>
             </a:r>
-          </a:p>
-        </p:txBody>
-      </p:sp>
-      <p:sp>
-        <p:nvSpPr>
-          <p:cNvPr id="3" name="Text Placeholder 2">
-            <a:extLst>
-              <a:ext uri="{FF2B5EF4-FFF2-40B4-BE49-F238E27FC236}">
-                <a16:creationId xmlns:a16="http://schemas.microsoft.com/office/drawing/2014/main" id="{5935509A-545F-6691-9119-47A073D0143B}"/>
-              </a:ext>
-            </a:extLst>
-          </p:cNvPr>
+            <a:endParaRPr lang="en-US" dirty="0"/>
+          </a:p>
+        </p:txBody>
+      </p:sp>
+      <p:sp>
+        <p:nvSpPr>
+          <p:cNvPr id="3" name="Text Placeholder 2"/>
           <p:cNvSpPr>
             <a:spLocks noGrp="1"/>
           </p:cNvSpPr>
@@ -2821,8 +2487,8 @@
         </p:nvSpPr>
         <p:spPr>
           <a:xfrm>
-            <a:off x="838200" y="1825625"/>
-            <a:ext cx="10515600" cy="4351338"/>
+            <a:off x="628650" y="1825625"/>
+            <a:ext cx="7886700" cy="4351338"/>
           </a:xfrm>
           <a:prstGeom prst="rect">
             <a:avLst/>
@@ -2867,18 +2533,13 @@
               <a:rPr lang="en-US"/>
               <a:t>Fifth level</a:t>
             </a:r>
-          </a:p>
-        </p:txBody>
-      </p:sp>
-      <p:sp>
-        <p:nvSpPr>
-          <p:cNvPr id="4" name="Date Placeholder 3">
-            <a:extLst>
-              <a:ext uri="{FF2B5EF4-FFF2-40B4-BE49-F238E27FC236}">
-                <a16:creationId xmlns:a16="http://schemas.microsoft.com/office/drawing/2014/main" id="{B48FCAAE-1AD5-9CBF-A0F6-52A814732FD0}"/>
-              </a:ext>
-            </a:extLst>
-          </p:cNvPr>
+            <a:endParaRPr lang="en-US" dirty="0"/>
+          </a:p>
+        </p:txBody>
+      </p:sp>
+      <p:sp>
+        <p:nvSpPr>
+          <p:cNvPr id="4" name="Date Placeholder 3"/>
           <p:cNvSpPr>
             <a:spLocks noGrp="1"/>
           </p:cNvSpPr>
@@ -2888,8 +2549,8 @@
         </p:nvSpPr>
         <p:spPr>
           <a:xfrm>
-            <a:off x="838200" y="6356350"/>
-            <a:ext cx="2743200" cy="365125"/>
+            <a:off x="628650" y="6356351"/>
+            <a:ext cx="2057400" cy="365125"/>
           </a:xfrm>
           <a:prstGeom prst="rect">
             <a:avLst/>
@@ -2911,7 +2572,7 @@
           <a:p>
             <a:fld id="{E759A0DE-F190-5444-87AC-4719D5F20D15}" type="datetimeFigureOut">
               <a:rPr lang="en-US" smtClean="0"/>
-              <a:t>6/10/26</a:t>
+              <a:t>6/13/26</a:t>
             </a:fld>
             <a:endParaRPr lang="en-US"/>
           </a:p>
@@ -2919,13 +2580,7 @@
       </p:sp>
       <p:sp>
         <p:nvSpPr>
-          <p:cNvPr id="5" name="Footer Placeholder 4">
-            <a:extLst>
-              <a:ext uri="{FF2B5EF4-FFF2-40B4-BE49-F238E27FC236}">
-                <a16:creationId xmlns:a16="http://schemas.microsoft.com/office/drawing/2014/main" id="{22229717-0F21-BE11-1F19-88106B640856}"/>
-              </a:ext>
-            </a:extLst>
-          </p:cNvPr>
+          <p:cNvPr id="5" name="Footer Placeholder 4"/>
           <p:cNvSpPr>
             <a:spLocks noGrp="1"/>
           </p:cNvSpPr>
@@ -2935,8 +2590,8 @@
         </p:nvSpPr>
         <p:spPr>
           <a:xfrm>
-            <a:off x="4038600" y="6356350"/>
-            <a:ext cx="4114800" cy="365125"/>
+            <a:off x="3028950" y="6356351"/>
+            <a:ext cx="3086100" cy="365125"/>
           </a:xfrm>
           <a:prstGeom prst="rect">
             <a:avLst/>
@@ -2962,13 +2617,7 @@
       </p:sp>
       <p:sp>
         <p:nvSpPr>
-          <p:cNvPr id="6" name="Slide Number Placeholder 5">
-            <a:extLst>
-              <a:ext uri="{FF2B5EF4-FFF2-40B4-BE49-F238E27FC236}">
-                <a16:creationId xmlns:a16="http://schemas.microsoft.com/office/drawing/2014/main" id="{3858A247-FF8D-F68A-7E74-66F74B44BB8E}"/>
-              </a:ext>
-            </a:extLst>
-          </p:cNvPr>
+          <p:cNvPr id="6" name="Slide Number Placeholder 5"/>
           <p:cNvSpPr>
             <a:spLocks noGrp="1"/>
           </p:cNvSpPr>
@@ -2978,8 +2627,8 @@
         </p:nvSpPr>
         <p:spPr>
           <a:xfrm>
-            <a:off x="8610600" y="6356350"/>
-            <a:ext cx="2743200" cy="365125"/>
+            <a:off x="6457950" y="6356351"/>
+            <a:ext cx="2057400" cy="365125"/>
           </a:xfrm>
           <a:prstGeom prst="rect">
             <a:avLst/>
@@ -3010,23 +2659,23 @@
     </p:spTree>
     <p:extLst>
       <p:ext uri="{BB962C8B-B14F-4D97-AF65-F5344CB8AC3E}">
-        <p14:creationId xmlns:p14="http://schemas.microsoft.com/office/powerpoint/2010/main" val="3785378211"/>
+        <p14:creationId xmlns:p14="http://schemas.microsoft.com/office/powerpoint/2010/main" val="48467931"/>
       </p:ext>
     </p:extLst>
   </p:cSld>
   <p:clrMap bg1="lt1" tx1="dk1" bg2="lt2" tx2="dk2" accent1="accent1" accent2="accent2" accent3="accent3" accent4="accent4" accent5="accent5" accent6="accent6" hlink="hlink" folHlink="folHlink"/>
   <p:sldLayoutIdLst>
-    <p:sldLayoutId id="2147483649" r:id="rId1"/>
-    <p:sldLayoutId id="2147483650" r:id="rId2"/>
-    <p:sldLayoutId id="2147483651" r:id="rId3"/>
-    <p:sldLayoutId id="2147483652" r:id="rId4"/>
-    <p:sldLayoutId id="2147483653" r:id="rId5"/>
-    <p:sldLayoutId id="2147483654" r:id="rId6"/>
-    <p:sldLayoutId id="2147483655" r:id="rId7"/>
-    <p:sldLayoutId id="2147483656" r:id="rId8"/>
-    <p:sldLayoutId id="2147483657" r:id="rId9"/>
-    <p:sldLayoutId id="2147483658" r:id="rId10"/>
-    <p:sldLayoutId id="2147483659" r:id="rId11"/>
+    <p:sldLayoutId id="2147483661" r:id="rId1"/>
+    <p:sldLayoutId id="2147483662" r:id="rId2"/>
+    <p:sldLayoutId id="2147483663" r:id="rId3"/>
+    <p:sldLayoutId id="2147483664" r:id="rId4"/>
+    <p:sldLayoutId id="2147483665" r:id="rId5"/>
+    <p:sldLayoutId id="2147483666" r:id="rId6"/>
+    <p:sldLayoutId id="2147483667" r:id="rId7"/>
+    <p:sldLayoutId id="2147483668" r:id="rId8"/>
+    <p:sldLayoutId id="2147483669" r:id="rId9"/>
+    <p:sldLayoutId id="2147483670" r:id="rId10"/>
+    <p:sldLayoutId id="2147483671" r:id="rId11"/>
   </p:sldLayoutIdLst>
   <p:txStyles>
     <p:titleStyle>
@@ -3317,269 +2966,7 @@
     <p:bg>
       <p:bgPr>
         <a:solidFill>
-          <a:schemeClr val="bg1"/>
-        </a:solidFill>
-        <a:effectLst/>
-      </p:bgPr>
-    </p:bg>
-    <p:spTree>
-      <p:nvGrpSpPr>
-        <p:cNvPr id="1" name=""/>
-        <p:cNvGrpSpPr/>
-        <p:nvPr/>
-      </p:nvGrpSpPr>
-      <p:grpSpPr>
-        <a:xfrm>
-          <a:off x="0" y="0"/>
-          <a:ext cx="0" cy="0"/>
-          <a:chOff x="0" y="0"/>
-          <a:chExt cx="0" cy="0"/>
-        </a:xfrm>
-      </p:grpSpPr>
-      <p:sp useBgFill="1">
-        <p:nvSpPr>
-          <p:cNvPr id="33" name="Rectangle 32">
-            <a:extLst>
-              <a:ext uri="{FF2B5EF4-FFF2-40B4-BE49-F238E27FC236}">
-                <a16:creationId xmlns:a16="http://schemas.microsoft.com/office/drawing/2014/main" id="{ECC07320-C2CA-4E29-8481-9D9E143C7788}"/>
-              </a:ext>
-              <a:ext uri="{C183D7F6-B498-43B3-948B-1728B52AA6E4}">
-                <adec:decorative xmlns:adec="http://schemas.microsoft.com/office/drawing/2017/decorative" val="1"/>
-              </a:ext>
-            </a:extLst>
-          </p:cNvPr>
-          <p:cNvSpPr>
-            <a:spLocks noGrp="1" noRot="1" noChangeAspect="1" noMove="1" noResize="1" noEditPoints="1" noAdjustHandles="1" noChangeArrowheads="1" noChangeShapeType="1" noTextEdit="1"/>
-          </p:cNvSpPr>
-          <p:nvPr>
-            <p:extLst>
-              <p:ext uri="{386F3935-93C4-4BCD-93E2-E3B085C9AB24}">
-                <p16:designElem xmlns:p16="http://schemas.microsoft.com/office/powerpoint/2015/main" val="1"/>
-              </p:ext>
-            </p:extLst>
-          </p:nvPr>
-        </p:nvSpPr>
-        <p:spPr>
-          <a:xfrm>
-            <a:off x="-1" y="0"/>
-            <a:ext cx="12188952" cy="6858000"/>
-          </a:xfrm>
-          <a:prstGeom prst="rect">
-            <a:avLst/>
-          </a:prstGeom>
-          <a:ln>
-            <a:noFill/>
-          </a:ln>
-        </p:spPr>
-        <p:style>
-          <a:lnRef idx="2">
-            <a:schemeClr val="accent1">
-              <a:shade val="50000"/>
-            </a:schemeClr>
-          </a:lnRef>
-          <a:fillRef idx="1">
-            <a:schemeClr val="accent1"/>
-          </a:fillRef>
-          <a:effectRef idx="0">
-            <a:schemeClr val="accent1"/>
-          </a:effectRef>
-          <a:fontRef idx="minor">
-            <a:schemeClr val="lt1"/>
-          </a:fontRef>
-        </p:style>
-        <p:txBody>
-          <a:bodyPr rtlCol="0" anchor="ctr"/>
-          <a:lstStyle/>
-          <a:p>
-            <a:pPr algn="ctr"/>
-            <a:endParaRPr lang="en-US"/>
-          </a:p>
-        </p:txBody>
-      </p:sp>
-      <p:pic>
-        <p:nvPicPr>
-          <p:cNvPr id="5" name="Picture 4" descr="A mountain with snow and a sunset&#10;&#10;AI-generated content may be incorrect.">
-            <a:extLst>
-              <a:ext uri="{FF2B5EF4-FFF2-40B4-BE49-F238E27FC236}">
-                <a16:creationId xmlns:a16="http://schemas.microsoft.com/office/drawing/2014/main" id="{6A4D72FC-DF1E-94F8-76BF-4DA02F41FD53}"/>
-              </a:ext>
-            </a:extLst>
-          </p:cNvPr>
-          <p:cNvPicPr>
-            <a:picLocks noChangeAspect="1"/>
-          </p:cNvPicPr>
-          <p:nvPr/>
-        </p:nvPicPr>
-        <p:blipFill>
-          <a:blip r:embed="rId2"/>
-          <a:srcRect l="3824" r="4528"/>
-          <a:stretch>
-            <a:fillRect/>
-          </a:stretch>
-        </p:blipFill>
-        <p:spPr>
-          <a:xfrm>
-            <a:off x="1" y="10"/>
-            <a:ext cx="9669642" cy="6857990"/>
-          </a:xfrm>
-          <a:prstGeom prst="rect">
-            <a:avLst/>
-          </a:prstGeom>
-        </p:spPr>
-      </p:pic>
-      <p:sp>
-        <p:nvSpPr>
-          <p:cNvPr id="34" name="Rectangle 33">
-            <a:extLst>
-              <a:ext uri="{FF2B5EF4-FFF2-40B4-BE49-F238E27FC236}">
-                <a16:creationId xmlns:a16="http://schemas.microsoft.com/office/drawing/2014/main" id="{178FB36B-5BFE-42CA-BC60-1115E0D95EEC}"/>
-              </a:ext>
-              <a:ext uri="{C183D7F6-B498-43B3-948B-1728B52AA6E4}">
-                <adec:decorative xmlns:adec="http://schemas.microsoft.com/office/drawing/2017/decorative" val="1"/>
-              </a:ext>
-            </a:extLst>
-          </p:cNvPr>
-          <p:cNvSpPr>
-            <a:spLocks noGrp="1" noRot="1" noChangeAspect="1" noMove="1" noResize="1" noEditPoints="1" noAdjustHandles="1" noChangeArrowheads="1" noChangeShapeType="1" noTextEdit="1"/>
-          </p:cNvSpPr>
-          <p:nvPr>
-            <p:extLst>
-              <p:ext uri="{386F3935-93C4-4BCD-93E2-E3B085C9AB24}">
-                <p16:designElem xmlns:p16="http://schemas.microsoft.com/office/powerpoint/2015/main" val="1"/>
-              </p:ext>
-            </p:extLst>
-          </p:nvPr>
-        </p:nvSpPr>
-        <p:spPr>
-          <a:xfrm flipH="1">
-            <a:off x="5125019" y="0"/>
-            <a:ext cx="7066978" cy="6858000"/>
-          </a:xfrm>
-          <a:prstGeom prst="rect">
-            <a:avLst/>
-          </a:prstGeom>
-          <a:gradFill>
-            <a:gsLst>
-              <a:gs pos="48000">
-                <a:schemeClr val="bg1"/>
-              </a:gs>
-              <a:gs pos="35000">
-                <a:schemeClr val="bg1">
-                  <a:alpha val="77000"/>
-                </a:schemeClr>
-              </a:gs>
-              <a:gs pos="19000">
-                <a:schemeClr val="bg1">
-                  <a:alpha val="38000"/>
-                </a:schemeClr>
-              </a:gs>
-              <a:gs pos="0">
-                <a:schemeClr val="bg1">
-                  <a:alpha val="0"/>
-                </a:schemeClr>
-              </a:gs>
-              <a:gs pos="100000">
-                <a:schemeClr val="bg1"/>
-              </a:gs>
-            </a:gsLst>
-            <a:lin ang="10800000" scaled="0"/>
-          </a:gradFill>
-          <a:ln>
-            <a:noFill/>
-          </a:ln>
-        </p:spPr>
-        <p:style>
-          <a:lnRef idx="2">
-            <a:schemeClr val="accent1">
-              <a:shade val="50000"/>
-            </a:schemeClr>
-          </a:lnRef>
-          <a:fillRef idx="1">
-            <a:schemeClr val="accent1"/>
-          </a:fillRef>
-          <a:effectRef idx="0">
-            <a:schemeClr val="accent1"/>
-          </a:effectRef>
-          <a:fontRef idx="minor">
-            <a:schemeClr val="lt1"/>
-          </a:fontRef>
-        </p:style>
-        <p:txBody>
-          <a:bodyPr rtlCol="0" anchor="ctr"/>
-          <a:lstStyle/>
-          <a:p>
-            <a:pPr algn="ctr"/>
-            <a:endParaRPr lang="en-US" dirty="0"/>
-          </a:p>
-        </p:txBody>
-      </p:sp>
-      <p:sp>
-        <p:nvSpPr>
-          <p:cNvPr id="3" name="Subtitle 2">
-            <a:extLst>
-              <a:ext uri="{FF2B5EF4-FFF2-40B4-BE49-F238E27FC236}">
-                <a16:creationId xmlns:a16="http://schemas.microsoft.com/office/drawing/2014/main" id="{BDDF4048-2958-B759-F7D1-45755BE99DD7}"/>
-              </a:ext>
-            </a:extLst>
-          </p:cNvPr>
-          <p:cNvSpPr>
-            <a:spLocks noGrp="1"/>
-          </p:cNvSpPr>
-          <p:nvPr>
-            <p:ph type="subTitle" idx="1"/>
-          </p:nvPr>
-        </p:nvSpPr>
-        <p:spPr>
-          <a:xfrm>
-            <a:off x="7935403" y="4629234"/>
-            <a:ext cx="3445766" cy="1485319"/>
-          </a:xfrm>
-          <a:noFill/>
-        </p:spPr>
-        <p:txBody>
-          <a:bodyPr>
-            <a:normAutofit/>
-          </a:bodyPr>
-          <a:lstStyle/>
-          <a:p>
-            <a:pPr algn="l"/>
-            <a:endParaRPr lang="en-US" dirty="0">
-              <a:latin typeface="Avenir Medium" panose="02000503020000020003" pitchFamily="2" charset="0"/>
-              <a:ea typeface="Bodoni Ornaments" pitchFamily="2" charset="0"/>
-            </a:endParaRPr>
-          </a:p>
-          <a:p>
-            <a:pPr algn="l"/>
-            <a:r>
-              <a:rPr lang="en-US" i="1" dirty="0">
-                <a:latin typeface="Avenir Oblique" panose="02000503020000020003" pitchFamily="2" charset="0"/>
-                <a:ea typeface="Bodoni Ornaments" pitchFamily="2" charset="0"/>
-              </a:rPr>
-              <a:t>Only A Holy God</a:t>
-            </a:r>
-          </a:p>
-        </p:txBody>
-      </p:sp>
-    </p:spTree>
-    <p:extLst>
-      <p:ext uri="{BB962C8B-B14F-4D97-AF65-F5344CB8AC3E}">
-        <p14:creationId xmlns:p14="http://schemas.microsoft.com/office/powerpoint/2010/main" val="1687888858"/>
-      </p:ext>
-    </p:extLst>
-  </p:cSld>
-  <p:clrMapOvr>
-    <a:masterClrMapping/>
-  </p:clrMapOvr>
-</p:sld>
-</file>
-
-<file path=ppt/slides/slide2.xml><?xml version="1.0" encoding="utf-8"?>
-<p:sld xmlns:a="http://schemas.openxmlformats.org/drawingml/2006/main" xmlns:r="http://schemas.openxmlformats.org/officeDocument/2006/relationships" xmlns:p="http://schemas.openxmlformats.org/presentationml/2006/main">
-  <p:cSld>
-    <p:bg>
-      <p:bgPr>
-        <a:solidFill>
-          <a:schemeClr val="accent1"/>
+          <a:schemeClr val="tx1"/>
         </a:solidFill>
         <a:effectLst/>
       </p:bgPr>
@@ -3622,8 +3009,8 @@
         </p:nvSpPr>
         <p:spPr>
           <a:xfrm>
-            <a:off x="112295" y="192505"/>
-            <a:ext cx="11855116" cy="6481011"/>
+            <a:off x="84221" y="213360"/>
+            <a:ext cx="8891337" cy="6416040"/>
           </a:xfrm>
         </p:spPr>
         <p:txBody>
@@ -3632,13 +3019,82 @@
           </a:bodyPr>
           <a:lstStyle/>
           <a:p>
-            <a:endParaRPr lang="en-US" sz="4400" dirty="0">
+            <a:endParaRPr lang="en-US" sz="4000" dirty="0">
               <a:solidFill>
                 <a:schemeClr val="bg1"/>
               </a:solidFill>
               <a:latin typeface="Avenir Medium" panose="02000503020000020003" pitchFamily="2" charset="0"/>
               <a:ea typeface="Bodoni Ornaments" pitchFamily="2" charset="0"/>
             </a:endParaRPr>
+          </a:p>
+          <a:p>
+            <a:endParaRPr lang="en-US" sz="4000" dirty="0">
+              <a:solidFill>
+                <a:schemeClr val="bg1"/>
+              </a:solidFill>
+              <a:latin typeface="Avenir Medium" panose="02000503020000020003" pitchFamily="2" charset="0"/>
+              <a:ea typeface="Bodoni Ornaments" pitchFamily="2" charset="0"/>
+            </a:endParaRPr>
+          </a:p>
+          <a:p>
+            <a:r>
+              <a:rPr lang="en-US" sz="4000" dirty="0">
+                <a:solidFill>
+                  <a:schemeClr val="bg1"/>
+                </a:solidFill>
+                <a:latin typeface="Avenir Medium" panose="02000503020000020003" pitchFamily="2" charset="0"/>
+                <a:ea typeface="Bodoni Ornaments" pitchFamily="2" charset="0"/>
+              </a:rPr>
+              <a:t>Take my life and let it be </a:t>
+            </a:r>
+          </a:p>
+          <a:p>
+            <a:r>
+              <a:rPr lang="en-US" sz="4000" dirty="0">
+                <a:solidFill>
+                  <a:schemeClr val="bg1"/>
+                </a:solidFill>
+                <a:latin typeface="Avenir Medium" panose="02000503020000020003" pitchFamily="2" charset="0"/>
+                <a:ea typeface="Bodoni Ornaments" pitchFamily="2" charset="0"/>
+              </a:rPr>
+              <a:t>Consecrated, Lord, to Thee.</a:t>
+            </a:r>
+          </a:p>
+          <a:p>
+            <a:r>
+              <a:rPr lang="en-US" sz="4000" dirty="0">
+                <a:solidFill>
+                  <a:schemeClr val="bg1"/>
+                </a:solidFill>
+                <a:latin typeface="Avenir Medium" panose="02000503020000020003" pitchFamily="2" charset="0"/>
+                <a:ea typeface="Bodoni Ornaments" pitchFamily="2" charset="0"/>
+              </a:rPr>
+              <a:t>Take my moments and my days, </a:t>
+            </a:r>
+          </a:p>
+          <a:p>
+            <a:r>
+              <a:rPr lang="en-US" sz="4000" dirty="0">
+                <a:solidFill>
+                  <a:schemeClr val="bg1"/>
+                </a:solidFill>
+                <a:latin typeface="Avenir Medium" panose="02000503020000020003" pitchFamily="2" charset="0"/>
+                <a:ea typeface="Bodoni Ornaments" pitchFamily="2" charset="0"/>
+              </a:rPr>
+              <a:t>Let them flow in ceaseless praise.</a:t>
+            </a:r>
+          </a:p>
+          <a:p>
+            <a:r>
+              <a:rPr lang="en-US" sz="4000" dirty="0">
+                <a:solidFill>
+                  <a:schemeClr val="bg1"/>
+                </a:solidFill>
+                <a:latin typeface="Avenir Medium" panose="02000503020000020003" pitchFamily="2" charset="0"/>
+                <a:ea typeface="Bodoni Ornaments" pitchFamily="2" charset="0"/>
+              </a:rPr>
+              <a:t>Let them flow in ceaseless praise</a:t>
+            </a:r>
           </a:p>
         </p:txBody>
       </p:sp>
@@ -3655,15 +3111,13 @@
 </p:sld>
 </file>
 
-<file path=ppt/slides/slide3.xml><?xml version="1.0" encoding="utf-8"?>
+<file path=ppt/slides/slide2.xml><?xml version="1.0" encoding="utf-8"?>
 <p:sld xmlns:a="http://schemas.openxmlformats.org/drawingml/2006/main" xmlns:r="http://schemas.openxmlformats.org/officeDocument/2006/relationships" xmlns:p="http://schemas.openxmlformats.org/presentationml/2006/main">
   <p:cSld>
     <p:bg>
       <p:bgPr>
         <a:solidFill>
-          <a:schemeClr val="accent5">
-            <a:lumMod val="50000"/>
-          </a:schemeClr>
+          <a:schemeClr val="tx1"/>
         </a:solidFill>
         <a:effectLst/>
       </p:bgPr>
@@ -3706,8 +3160,8 @@
         </p:nvSpPr>
         <p:spPr>
           <a:xfrm>
-            <a:off x="192505" y="208547"/>
-            <a:ext cx="11871158" cy="6464969"/>
+            <a:off x="144379" y="228600"/>
+            <a:ext cx="8903369" cy="6431280"/>
           </a:xfrm>
         </p:spPr>
         <p:txBody>
@@ -3716,13 +3170,82 @@
           </a:bodyPr>
           <a:lstStyle/>
           <a:p>
-            <a:endParaRPr lang="en-US" sz="4400" dirty="0">
+            <a:endParaRPr lang="en-US" sz="4000" dirty="0">
               <a:solidFill>
                 <a:schemeClr val="bg1"/>
               </a:solidFill>
               <a:latin typeface="Avenir Medium" panose="02000503020000020003" pitchFamily="2" charset="0"/>
               <a:ea typeface="Bodoni Ornaments" pitchFamily="2" charset="0"/>
             </a:endParaRPr>
+          </a:p>
+          <a:p>
+            <a:endParaRPr lang="en-US" sz="4000" dirty="0">
+              <a:solidFill>
+                <a:schemeClr val="bg1"/>
+              </a:solidFill>
+              <a:latin typeface="Avenir Medium" panose="02000503020000020003" pitchFamily="2" charset="0"/>
+              <a:ea typeface="Bodoni Ornaments" pitchFamily="2" charset="0"/>
+            </a:endParaRPr>
+          </a:p>
+          <a:p>
+            <a:r>
+              <a:rPr lang="en-US" sz="4000" dirty="0">
+                <a:solidFill>
+                  <a:schemeClr val="bg1"/>
+                </a:solidFill>
+                <a:latin typeface="Avenir Medium" panose="02000503020000020003" pitchFamily="2" charset="0"/>
+                <a:ea typeface="Bodoni Ornaments" pitchFamily="2" charset="0"/>
+              </a:rPr>
+              <a:t>Take my hands, and let them move </a:t>
+            </a:r>
+          </a:p>
+          <a:p>
+            <a:r>
+              <a:rPr lang="en-US" sz="4000" dirty="0">
+                <a:solidFill>
+                  <a:schemeClr val="bg1"/>
+                </a:solidFill>
+                <a:latin typeface="Avenir Medium" panose="02000503020000020003" pitchFamily="2" charset="0"/>
+                <a:ea typeface="Bodoni Ornaments" pitchFamily="2" charset="0"/>
+              </a:rPr>
+              <a:t>At the impulse of Thy love;</a:t>
+            </a:r>
+          </a:p>
+          <a:p>
+            <a:r>
+              <a:rPr lang="en-US" sz="4000" dirty="0">
+                <a:solidFill>
+                  <a:schemeClr val="bg1"/>
+                </a:solidFill>
+                <a:latin typeface="Avenir Medium" panose="02000503020000020003" pitchFamily="2" charset="0"/>
+                <a:ea typeface="Bodoni Ornaments" pitchFamily="2" charset="0"/>
+              </a:rPr>
+              <a:t>Take my feet and let them be </a:t>
+            </a:r>
+          </a:p>
+          <a:p>
+            <a:r>
+              <a:rPr lang="en-US" sz="4000" dirty="0">
+                <a:solidFill>
+                  <a:schemeClr val="bg1"/>
+                </a:solidFill>
+                <a:latin typeface="Avenir Medium" panose="02000503020000020003" pitchFamily="2" charset="0"/>
+                <a:ea typeface="Bodoni Ornaments" pitchFamily="2" charset="0"/>
+              </a:rPr>
+              <a:t>Swift and beautiful for Thee,</a:t>
+            </a:r>
+          </a:p>
+          <a:p>
+            <a:r>
+              <a:rPr lang="en-US" sz="4000" dirty="0">
+                <a:solidFill>
+                  <a:schemeClr val="bg1"/>
+                </a:solidFill>
+                <a:latin typeface="Avenir Medium" panose="02000503020000020003" pitchFamily="2" charset="0"/>
+                <a:ea typeface="Bodoni Ornaments" pitchFamily="2" charset="0"/>
+              </a:rPr>
+              <a:t>Swift and beautiful for Thee</a:t>
+            </a:r>
           </a:p>
         </p:txBody>
       </p:sp>
@@ -3739,10 +3262,505 @@
 </p:sld>
 </file>
 
+<file path=ppt/slides/slide3.xml><?xml version="1.0" encoding="utf-8"?>
+<p:sld xmlns:a="http://schemas.openxmlformats.org/drawingml/2006/main" xmlns:r="http://schemas.openxmlformats.org/officeDocument/2006/relationships" xmlns:p="http://schemas.openxmlformats.org/presentationml/2006/main">
+  <p:cSld>
+    <p:bg>
+      <p:bgPr>
+        <a:solidFill>
+          <a:schemeClr val="tx1"/>
+        </a:solidFill>
+        <a:effectLst/>
+      </p:bgPr>
+    </p:bg>
+    <p:spTree>
+      <p:nvGrpSpPr>
+        <p:cNvPr id="1" name="">
+          <a:extLst>
+            <a:ext uri="{FF2B5EF4-FFF2-40B4-BE49-F238E27FC236}">
+              <a16:creationId xmlns:a16="http://schemas.microsoft.com/office/drawing/2014/main" id="{7362FE4F-97C9-4BFD-2ED3-0780F4440CA5}"/>
+            </a:ext>
+          </a:extLst>
+        </p:cNvPr>
+        <p:cNvGrpSpPr/>
+        <p:nvPr/>
+      </p:nvGrpSpPr>
+      <p:grpSpPr>
+        <a:xfrm>
+          <a:off x="0" y="0"/>
+          <a:ext cx="0" cy="0"/>
+          <a:chOff x="0" y="0"/>
+          <a:chExt cx="0" cy="0"/>
+        </a:xfrm>
+      </p:grpSpPr>
+      <p:sp>
+        <p:nvSpPr>
+          <p:cNvPr id="3" name="Subtitle 2">
+            <a:extLst>
+              <a:ext uri="{FF2B5EF4-FFF2-40B4-BE49-F238E27FC236}">
+                <a16:creationId xmlns:a16="http://schemas.microsoft.com/office/drawing/2014/main" id="{3980CC98-5B94-C776-5F67-1A8761B7E723}"/>
+              </a:ext>
+            </a:extLst>
+          </p:cNvPr>
+          <p:cNvSpPr>
+            <a:spLocks noGrp="1"/>
+          </p:cNvSpPr>
+          <p:nvPr>
+            <p:ph type="subTitle" idx="1"/>
+          </p:nvPr>
+        </p:nvSpPr>
+        <p:spPr>
+          <a:xfrm>
+            <a:off x="144379" y="228600"/>
+            <a:ext cx="8903369" cy="6431280"/>
+          </a:xfrm>
+        </p:spPr>
+        <p:txBody>
+          <a:bodyPr>
+            <a:noAutofit/>
+          </a:bodyPr>
+          <a:lstStyle/>
+          <a:p>
+            <a:endParaRPr lang="en-US" sz="4000" dirty="0">
+              <a:solidFill>
+                <a:schemeClr val="bg1"/>
+              </a:solidFill>
+              <a:latin typeface="Avenir Medium" panose="02000503020000020003" pitchFamily="2" charset="0"/>
+              <a:ea typeface="Bodoni Ornaments" pitchFamily="2" charset="0"/>
+            </a:endParaRPr>
+          </a:p>
+          <a:p>
+            <a:r>
+              <a:rPr lang="en-US" sz="4000" dirty="0">
+                <a:solidFill>
+                  <a:schemeClr val="bg1"/>
+                </a:solidFill>
+                <a:latin typeface="Avenir Medium" panose="02000503020000020003" pitchFamily="2" charset="0"/>
+                <a:ea typeface="Bodoni Ornaments" pitchFamily="2" charset="0"/>
+              </a:rPr>
+              <a:t>Take my voice, and let me sing </a:t>
+            </a:r>
+          </a:p>
+          <a:p>
+            <a:r>
+              <a:rPr lang="en-US" sz="4000" dirty="0">
+                <a:solidFill>
+                  <a:schemeClr val="bg1"/>
+                </a:solidFill>
+                <a:latin typeface="Avenir Medium" panose="02000503020000020003" pitchFamily="2" charset="0"/>
+                <a:ea typeface="Bodoni Ornaments" pitchFamily="2" charset="0"/>
+              </a:rPr>
+              <a:t>Always, only, for my King;</a:t>
+            </a:r>
+          </a:p>
+          <a:p>
+            <a:r>
+              <a:rPr lang="en-US" sz="4000" dirty="0">
+                <a:solidFill>
+                  <a:schemeClr val="bg1"/>
+                </a:solidFill>
+                <a:latin typeface="Avenir Medium" panose="02000503020000020003" pitchFamily="2" charset="0"/>
+                <a:ea typeface="Bodoni Ornaments" pitchFamily="2" charset="0"/>
+              </a:rPr>
+              <a:t>Take my lips, and let them be </a:t>
+            </a:r>
+          </a:p>
+          <a:p>
+            <a:r>
+              <a:rPr lang="en-US" sz="4000" dirty="0">
+                <a:solidFill>
+                  <a:schemeClr val="bg1"/>
+                </a:solidFill>
+                <a:latin typeface="Avenir Medium" panose="02000503020000020003" pitchFamily="2" charset="0"/>
+                <a:ea typeface="Bodoni Ornaments" pitchFamily="2" charset="0"/>
+              </a:rPr>
+              <a:t>Filled with messages from Thee,</a:t>
+            </a:r>
+          </a:p>
+          <a:p>
+            <a:r>
+              <a:rPr lang="en-US" sz="4000" dirty="0">
+                <a:solidFill>
+                  <a:schemeClr val="bg1"/>
+                </a:solidFill>
+                <a:latin typeface="Avenir Medium" panose="02000503020000020003" pitchFamily="2" charset="0"/>
+                <a:ea typeface="Bodoni Ornaments" pitchFamily="2" charset="0"/>
+              </a:rPr>
+              <a:t>Filled with messages from Thee.</a:t>
+            </a:r>
+          </a:p>
+          <a:p>
+            <a:endParaRPr lang="en-US" sz="4000" dirty="0">
+              <a:solidFill>
+                <a:schemeClr val="bg1"/>
+              </a:solidFill>
+              <a:latin typeface="Avenir Medium" panose="02000503020000020003" pitchFamily="2" charset="0"/>
+              <a:ea typeface="Bodoni Ornaments" pitchFamily="2" charset="0"/>
+            </a:endParaRPr>
+          </a:p>
+        </p:txBody>
+      </p:sp>
+    </p:spTree>
+    <p:extLst>
+      <p:ext uri="{BB962C8B-B14F-4D97-AF65-F5344CB8AC3E}">
+        <p14:creationId xmlns:p14="http://schemas.microsoft.com/office/powerpoint/2010/main" val="1189714033"/>
+      </p:ext>
+    </p:extLst>
+  </p:cSld>
+  <p:clrMapOvr>
+    <a:masterClrMapping/>
+  </p:clrMapOvr>
+</p:sld>
+</file>
+
+<file path=ppt/slides/slide4.xml><?xml version="1.0" encoding="utf-8"?>
+<p:sld xmlns:a="http://schemas.openxmlformats.org/drawingml/2006/main" xmlns:r="http://schemas.openxmlformats.org/officeDocument/2006/relationships" xmlns:p="http://schemas.openxmlformats.org/presentationml/2006/main">
+  <p:cSld>
+    <p:bg>
+      <p:bgPr>
+        <a:solidFill>
+          <a:schemeClr val="tx1"/>
+        </a:solidFill>
+        <a:effectLst/>
+      </p:bgPr>
+    </p:bg>
+    <p:spTree>
+      <p:nvGrpSpPr>
+        <p:cNvPr id="1" name="">
+          <a:extLst>
+            <a:ext uri="{FF2B5EF4-FFF2-40B4-BE49-F238E27FC236}">
+              <a16:creationId xmlns:a16="http://schemas.microsoft.com/office/drawing/2014/main" id="{B652386E-0F2A-A4DA-00BE-00BA5C284095}"/>
+            </a:ext>
+          </a:extLst>
+        </p:cNvPr>
+        <p:cNvGrpSpPr/>
+        <p:nvPr/>
+      </p:nvGrpSpPr>
+      <p:grpSpPr>
+        <a:xfrm>
+          <a:off x="0" y="0"/>
+          <a:ext cx="0" cy="0"/>
+          <a:chOff x="0" y="0"/>
+          <a:chExt cx="0" cy="0"/>
+        </a:xfrm>
+      </p:grpSpPr>
+      <p:sp>
+        <p:nvSpPr>
+          <p:cNvPr id="3" name="Subtitle 2">
+            <a:extLst>
+              <a:ext uri="{FF2B5EF4-FFF2-40B4-BE49-F238E27FC236}">
+                <a16:creationId xmlns:a16="http://schemas.microsoft.com/office/drawing/2014/main" id="{635C3D88-BBBA-1C88-1408-D9D8F59C4F43}"/>
+              </a:ext>
+            </a:extLst>
+          </p:cNvPr>
+          <p:cNvSpPr>
+            <a:spLocks noGrp="1"/>
+          </p:cNvSpPr>
+          <p:nvPr>
+            <p:ph type="subTitle" idx="1"/>
+          </p:nvPr>
+        </p:nvSpPr>
+        <p:spPr>
+          <a:xfrm>
+            <a:off x="144379" y="228600"/>
+            <a:ext cx="8903369" cy="6431280"/>
+          </a:xfrm>
+        </p:spPr>
+        <p:txBody>
+          <a:bodyPr>
+            <a:noAutofit/>
+          </a:bodyPr>
+          <a:lstStyle/>
+          <a:p>
+            <a:r>
+              <a:rPr lang="en-US" sz="4000" dirty="0">
+                <a:solidFill>
+                  <a:schemeClr val="bg1"/>
+                </a:solidFill>
+                <a:latin typeface="Avenir Medium" panose="02000503020000020003" pitchFamily="2" charset="0"/>
+                <a:ea typeface="Bodoni Ornaments" pitchFamily="2" charset="0"/>
+              </a:rPr>
+              <a:t> </a:t>
+            </a:r>
+          </a:p>
+          <a:p>
+            <a:r>
+              <a:rPr lang="en-US" sz="4000" dirty="0">
+                <a:solidFill>
+                  <a:schemeClr val="bg1"/>
+                </a:solidFill>
+                <a:latin typeface="Avenir Medium" panose="02000503020000020003" pitchFamily="2" charset="0"/>
+                <a:ea typeface="Bodoni Ornaments" pitchFamily="2" charset="0"/>
+              </a:rPr>
+              <a:t>Take my will, and make it Thine; </a:t>
+            </a:r>
+          </a:p>
+          <a:p>
+            <a:r>
+              <a:rPr lang="en-US" sz="4000" dirty="0">
+                <a:solidFill>
+                  <a:schemeClr val="bg1"/>
+                </a:solidFill>
+                <a:latin typeface="Avenir Medium" panose="02000503020000020003" pitchFamily="2" charset="0"/>
+                <a:ea typeface="Bodoni Ornaments" pitchFamily="2" charset="0"/>
+              </a:rPr>
+              <a:t>It shall be no longer mine.</a:t>
+            </a:r>
+          </a:p>
+          <a:p>
+            <a:r>
+              <a:rPr lang="en-US" sz="4000" dirty="0">
+                <a:solidFill>
+                  <a:schemeClr val="bg1"/>
+                </a:solidFill>
+                <a:latin typeface="Avenir Medium" panose="02000503020000020003" pitchFamily="2" charset="0"/>
+                <a:ea typeface="Bodoni Ornaments" pitchFamily="2" charset="0"/>
+              </a:rPr>
+              <a:t>Take my heart; it is Thine own; </a:t>
+            </a:r>
+          </a:p>
+          <a:p>
+            <a:r>
+              <a:rPr lang="en-US" sz="4000" dirty="0">
+                <a:solidFill>
+                  <a:schemeClr val="bg1"/>
+                </a:solidFill>
+                <a:latin typeface="Avenir Medium" panose="02000503020000020003" pitchFamily="2" charset="0"/>
+                <a:ea typeface="Bodoni Ornaments" pitchFamily="2" charset="0"/>
+              </a:rPr>
+              <a:t>It shall be Thy royal throne,</a:t>
+            </a:r>
+          </a:p>
+          <a:p>
+            <a:r>
+              <a:rPr lang="en-US" sz="4000" dirty="0">
+                <a:solidFill>
+                  <a:schemeClr val="bg1"/>
+                </a:solidFill>
+                <a:latin typeface="Avenir Medium" panose="02000503020000020003" pitchFamily="2" charset="0"/>
+                <a:ea typeface="Bodoni Ornaments" pitchFamily="2" charset="0"/>
+              </a:rPr>
+              <a:t>It shall be Thy royal throne.</a:t>
+            </a:r>
+          </a:p>
+          <a:p>
+            <a:endParaRPr lang="en-US" sz="4000" dirty="0">
+              <a:solidFill>
+                <a:schemeClr val="bg1"/>
+              </a:solidFill>
+              <a:latin typeface="Avenir Medium" panose="02000503020000020003" pitchFamily="2" charset="0"/>
+              <a:ea typeface="Bodoni Ornaments" pitchFamily="2" charset="0"/>
+            </a:endParaRPr>
+          </a:p>
+        </p:txBody>
+      </p:sp>
+    </p:spTree>
+    <p:extLst>
+      <p:ext uri="{BB962C8B-B14F-4D97-AF65-F5344CB8AC3E}">
+        <p14:creationId xmlns:p14="http://schemas.microsoft.com/office/powerpoint/2010/main" val="1597081553"/>
+      </p:ext>
+    </p:extLst>
+  </p:cSld>
+  <p:clrMapOvr>
+    <a:masterClrMapping/>
+  </p:clrMapOvr>
+</p:sld>
+</file>
+
+<file path=ppt/slides/slide5.xml><?xml version="1.0" encoding="utf-8"?>
+<p:sld xmlns:a="http://schemas.openxmlformats.org/drawingml/2006/main" xmlns:r="http://schemas.openxmlformats.org/officeDocument/2006/relationships" xmlns:p="http://schemas.openxmlformats.org/presentationml/2006/main">
+  <p:cSld>
+    <p:bg>
+      <p:bgPr>
+        <a:solidFill>
+          <a:schemeClr val="tx1"/>
+        </a:solidFill>
+        <a:effectLst/>
+      </p:bgPr>
+    </p:bg>
+    <p:spTree>
+      <p:nvGrpSpPr>
+        <p:cNvPr id="1" name="">
+          <a:extLst>
+            <a:ext uri="{FF2B5EF4-FFF2-40B4-BE49-F238E27FC236}">
+              <a16:creationId xmlns:a16="http://schemas.microsoft.com/office/drawing/2014/main" id="{35BFBF6E-A800-A557-4607-B211D092B56C}"/>
+            </a:ext>
+          </a:extLst>
+        </p:cNvPr>
+        <p:cNvGrpSpPr/>
+        <p:nvPr/>
+      </p:nvGrpSpPr>
+      <p:grpSpPr>
+        <a:xfrm>
+          <a:off x="0" y="0"/>
+          <a:ext cx="0" cy="0"/>
+          <a:chOff x="0" y="0"/>
+          <a:chExt cx="0" cy="0"/>
+        </a:xfrm>
+      </p:grpSpPr>
+      <p:sp>
+        <p:nvSpPr>
+          <p:cNvPr id="3" name="Subtitle 2">
+            <a:extLst>
+              <a:ext uri="{FF2B5EF4-FFF2-40B4-BE49-F238E27FC236}">
+                <a16:creationId xmlns:a16="http://schemas.microsoft.com/office/drawing/2014/main" id="{9C31C481-F61F-FA71-2898-FC5F29B5D3D4}"/>
+              </a:ext>
+            </a:extLst>
+          </p:cNvPr>
+          <p:cNvSpPr>
+            <a:spLocks noGrp="1"/>
+          </p:cNvSpPr>
+          <p:nvPr>
+            <p:ph type="subTitle" idx="1"/>
+          </p:nvPr>
+        </p:nvSpPr>
+        <p:spPr>
+          <a:xfrm>
+            <a:off x="144379" y="228600"/>
+            <a:ext cx="8903369" cy="6431280"/>
+          </a:xfrm>
+        </p:spPr>
+        <p:txBody>
+          <a:bodyPr>
+            <a:noAutofit/>
+          </a:bodyPr>
+          <a:lstStyle/>
+          <a:p>
+            <a:endParaRPr lang="en-US" sz="4000" dirty="0">
+              <a:solidFill>
+                <a:schemeClr val="bg1"/>
+              </a:solidFill>
+              <a:latin typeface="Avenir Medium" panose="02000503020000020003" pitchFamily="2" charset="0"/>
+              <a:ea typeface="Bodoni Ornaments" pitchFamily="2" charset="0"/>
+            </a:endParaRPr>
+          </a:p>
+          <a:p>
+            <a:r>
+              <a:rPr lang="en-US" sz="4000" dirty="0">
+                <a:solidFill>
+                  <a:schemeClr val="bg1"/>
+                </a:solidFill>
+                <a:latin typeface="Avenir Medium" panose="02000503020000020003" pitchFamily="2" charset="0"/>
+                <a:ea typeface="Bodoni Ornaments" pitchFamily="2" charset="0"/>
+              </a:rPr>
+              <a:t>Take my love; my Lord, I pour </a:t>
+            </a:r>
+          </a:p>
+          <a:p>
+            <a:r>
+              <a:rPr lang="en-US" sz="4000" dirty="0">
+                <a:solidFill>
+                  <a:schemeClr val="bg1"/>
+                </a:solidFill>
+                <a:latin typeface="Avenir Medium" panose="02000503020000020003" pitchFamily="2" charset="0"/>
+                <a:ea typeface="Bodoni Ornaments" pitchFamily="2" charset="0"/>
+              </a:rPr>
+              <a:t>At Thy feet its treasure store.</a:t>
+            </a:r>
+          </a:p>
+          <a:p>
+            <a:r>
+              <a:rPr lang="en-US" sz="4000" dirty="0">
+                <a:solidFill>
+                  <a:schemeClr val="bg1"/>
+                </a:solidFill>
+                <a:latin typeface="Avenir Medium" panose="02000503020000020003" pitchFamily="2" charset="0"/>
+                <a:ea typeface="Bodoni Ornaments" pitchFamily="2" charset="0"/>
+              </a:rPr>
+              <a:t>Take myself, and I will be </a:t>
+            </a:r>
+          </a:p>
+          <a:p>
+            <a:r>
+              <a:rPr lang="en-US" sz="4000" dirty="0">
+                <a:solidFill>
+                  <a:schemeClr val="bg1"/>
+                </a:solidFill>
+                <a:latin typeface="Avenir Medium" panose="02000503020000020003" pitchFamily="2" charset="0"/>
+                <a:ea typeface="Bodoni Ornaments" pitchFamily="2" charset="0"/>
+              </a:rPr>
+              <a:t>Ever, only, all for Thee,</a:t>
+            </a:r>
+          </a:p>
+          <a:p>
+            <a:r>
+              <a:rPr lang="en-US" sz="4000" dirty="0">
+                <a:solidFill>
+                  <a:schemeClr val="bg1"/>
+                </a:solidFill>
+                <a:latin typeface="Avenir Medium" panose="02000503020000020003" pitchFamily="2" charset="0"/>
+                <a:ea typeface="Bodoni Ornaments" pitchFamily="2" charset="0"/>
+              </a:rPr>
+              <a:t>Ever, only, all for Thee.</a:t>
+            </a:r>
+          </a:p>
+          <a:p>
+            <a:endParaRPr lang="en-US" sz="4000" dirty="0">
+              <a:solidFill>
+                <a:schemeClr val="bg1"/>
+              </a:solidFill>
+              <a:latin typeface="Avenir Medium" panose="02000503020000020003" pitchFamily="2" charset="0"/>
+              <a:ea typeface="Bodoni Ornaments" pitchFamily="2" charset="0"/>
+            </a:endParaRPr>
+          </a:p>
+        </p:txBody>
+      </p:sp>
+      <p:sp>
+        <p:nvSpPr>
+          <p:cNvPr id="2" name="TextBox 1">
+            <a:extLst>
+              <a:ext uri="{FF2B5EF4-FFF2-40B4-BE49-F238E27FC236}">
+                <a16:creationId xmlns:a16="http://schemas.microsoft.com/office/drawing/2014/main" id="{5DE5347E-CB9A-43DD-8F01-CD210F411994}"/>
+              </a:ext>
+            </a:extLst>
+          </p:cNvPr>
+          <p:cNvSpPr txBox="1"/>
+          <p:nvPr/>
+        </p:nvSpPr>
+        <p:spPr>
+          <a:xfrm>
+            <a:off x="7390614" y="6488668"/>
+            <a:ext cx="1753386" cy="369332"/>
+          </a:xfrm>
+          <a:prstGeom prst="rect">
+            <a:avLst/>
+          </a:prstGeom>
+          <a:noFill/>
+        </p:spPr>
+        <p:txBody>
+          <a:bodyPr wrap="square" rtlCol="0">
+            <a:spAutoFit/>
+          </a:bodyPr>
+          <a:lstStyle/>
+          <a:p>
+            <a:r>
+              <a:rPr lang="en-US" dirty="0">
+                <a:solidFill>
+                  <a:schemeClr val="bg1"/>
+                </a:solidFill>
+              </a:rPr>
+              <a:t>CCLI#7102397</a:t>
+            </a:r>
+          </a:p>
+        </p:txBody>
+      </p:sp>
+    </p:spTree>
+    <p:extLst>
+      <p:ext uri="{BB962C8B-B14F-4D97-AF65-F5344CB8AC3E}">
+        <p14:creationId xmlns:p14="http://schemas.microsoft.com/office/powerpoint/2010/main" val="2718413055"/>
+      </p:ext>
+    </p:extLst>
+  </p:cSld>
+  <p:clrMapOvr>
+    <a:masterClrMapping/>
+  </p:clrMapOvr>
+</p:sld>
+</file>
+
 <file path=ppt/theme/theme1.xml><?xml version="1.0" encoding="utf-8"?>
 <a:theme xmlns:a="http://schemas.openxmlformats.org/drawingml/2006/main" name="Office Theme">
   <a:themeElements>
-    <a:clrScheme name="Office">
+    <a:clrScheme name="Office Theme">
       <a:dk1>
         <a:sysClr val="windowText" lastClr="000000"/>
       </a:dk1>
@@ -3780,7 +3798,7 @@
         <a:srgbClr val="96607D"/>
       </a:folHlink>
     </a:clrScheme>
-    <a:fontScheme name="Office">
+    <a:fontScheme name="Office Theme">
       <a:majorFont>
         <a:latin typeface="Aptos Display" panose="02110004020202020204"/>
         <a:ea typeface=""/>
@@ -3886,7 +3904,7 @@
         <a:font script="Tfng" typeface="Ebrima"/>
       </a:minorFont>
     </a:fontScheme>
-    <a:fmtScheme name="Office">
+    <a:fmtScheme name="Office Theme">
       <a:fillStyleLst>
         <a:solidFill>
           <a:schemeClr val="phClr"/>

--- a/TEMPLATE_slides.pptx
+++ b/TEMPLATE_slides.pptx
@@ -6,10 +6,8 @@
   </p:sldMasterIdLst>
   <p:sldIdLst>
     <p:sldId id="274" r:id="rId2"/>
-    <p:sldId id="276" r:id="rId3"/>
-    <p:sldId id="277" r:id="rId4"/>
-    <p:sldId id="278" r:id="rId5"/>
-    <p:sldId id="279" r:id="rId6"/>
+    <p:sldId id="280" r:id="rId3"/>
+    <p:sldId id="279" r:id="rId4"/>
   </p:sldIdLst>
   <p:sldSz cx="9144000" cy="6858000" type="screen4x3"/>
   <p:notesSz cx="6858000" cy="9144000"/>
@@ -247,7 +245,7 @@
           <a:p>
             <a:fld id="{E759A0DE-F190-5444-87AC-4719D5F20D15}" type="datetimeFigureOut">
               <a:rPr lang="en-US" smtClean="0"/>
-              <a:t>6/13/26</a:t>
+              <a:t>6/19/26</a:t>
             </a:fld>
             <a:endParaRPr lang="en-US"/>
           </a:p>
@@ -417,7 +415,7 @@
           <a:p>
             <a:fld id="{E759A0DE-F190-5444-87AC-4719D5F20D15}" type="datetimeFigureOut">
               <a:rPr lang="en-US" smtClean="0"/>
-              <a:t>6/13/26</a:t>
+              <a:t>6/19/26</a:t>
             </a:fld>
             <a:endParaRPr lang="en-US"/>
           </a:p>
@@ -597,7 +595,7 @@
           <a:p>
             <a:fld id="{E759A0DE-F190-5444-87AC-4719D5F20D15}" type="datetimeFigureOut">
               <a:rPr lang="en-US" smtClean="0"/>
-              <a:t>6/13/26</a:t>
+              <a:t>6/19/26</a:t>
             </a:fld>
             <a:endParaRPr lang="en-US"/>
           </a:p>
@@ -767,7 +765,7 @@
           <a:p>
             <a:fld id="{E759A0DE-F190-5444-87AC-4719D5F20D15}" type="datetimeFigureOut">
               <a:rPr lang="en-US" smtClean="0"/>
-              <a:t>6/13/26</a:t>
+              <a:t>6/19/26</a:t>
             </a:fld>
             <a:endParaRPr lang="en-US"/>
           </a:p>
@@ -1013,7 +1011,7 @@
           <a:p>
             <a:fld id="{E759A0DE-F190-5444-87AC-4719D5F20D15}" type="datetimeFigureOut">
               <a:rPr lang="en-US" smtClean="0"/>
-              <a:t>6/13/26</a:t>
+              <a:t>6/19/26</a:t>
             </a:fld>
             <a:endParaRPr lang="en-US"/>
           </a:p>
@@ -1245,7 +1243,7 @@
           <a:p>
             <a:fld id="{E759A0DE-F190-5444-87AC-4719D5F20D15}" type="datetimeFigureOut">
               <a:rPr lang="en-US" smtClean="0"/>
-              <a:t>6/13/26</a:t>
+              <a:t>6/19/26</a:t>
             </a:fld>
             <a:endParaRPr lang="en-US"/>
           </a:p>
@@ -1612,7 +1610,7 @@
           <a:p>
             <a:fld id="{E759A0DE-F190-5444-87AC-4719D5F20D15}" type="datetimeFigureOut">
               <a:rPr lang="en-US" smtClean="0"/>
-              <a:t>6/13/26</a:t>
+              <a:t>6/19/26</a:t>
             </a:fld>
             <a:endParaRPr lang="en-US"/>
           </a:p>
@@ -1730,7 +1728,7 @@
           <a:p>
             <a:fld id="{E759A0DE-F190-5444-87AC-4719D5F20D15}" type="datetimeFigureOut">
               <a:rPr lang="en-US" smtClean="0"/>
-              <a:t>6/13/26</a:t>
+              <a:t>6/19/26</a:t>
             </a:fld>
             <a:endParaRPr lang="en-US"/>
           </a:p>
@@ -1825,7 +1823,7 @@
           <a:p>
             <a:fld id="{E759A0DE-F190-5444-87AC-4719D5F20D15}" type="datetimeFigureOut">
               <a:rPr lang="en-US" smtClean="0"/>
-              <a:t>6/13/26</a:t>
+              <a:t>6/19/26</a:t>
             </a:fld>
             <a:endParaRPr lang="en-US"/>
           </a:p>
@@ -2102,7 +2100,7 @@
           <a:p>
             <a:fld id="{E759A0DE-F190-5444-87AC-4719D5F20D15}" type="datetimeFigureOut">
               <a:rPr lang="en-US" smtClean="0"/>
-              <a:t>6/13/26</a:t>
+              <a:t>6/19/26</a:t>
             </a:fld>
             <a:endParaRPr lang="en-US"/>
           </a:p>
@@ -2359,7 +2357,7 @@
           <a:p>
             <a:fld id="{E759A0DE-F190-5444-87AC-4719D5F20D15}" type="datetimeFigureOut">
               <a:rPr lang="en-US" smtClean="0"/>
-              <a:t>6/13/26</a:t>
+              <a:t>6/19/26</a:t>
             </a:fld>
             <a:endParaRPr lang="en-US"/>
           </a:p>
@@ -2572,7 +2570,7 @@
           <a:p>
             <a:fld id="{E759A0DE-F190-5444-87AC-4719D5F20D15}" type="datetimeFigureOut">
               <a:rPr lang="en-US" smtClean="0"/>
-              <a:t>6/13/26</a:t>
+              <a:t>6/19/26</a:t>
             </a:fld>
             <a:endParaRPr lang="en-US"/>
           </a:p>
@@ -3019,81 +3017,16 @@
           </a:bodyPr>
           <a:lstStyle/>
           <a:p>
-            <a:endParaRPr lang="en-US" sz="4000" dirty="0">
-              <a:solidFill>
-                <a:schemeClr val="bg1"/>
-              </a:solidFill>
-              <a:latin typeface="Avenir Medium" panose="02000503020000020003" pitchFamily="2" charset="0"/>
-              <a:ea typeface="Bodoni Ornaments" pitchFamily="2" charset="0"/>
-            </a:endParaRPr>
-          </a:p>
-          <a:p>
-            <a:endParaRPr lang="en-US" sz="4000" dirty="0">
-              <a:solidFill>
-                <a:schemeClr val="bg1"/>
-              </a:solidFill>
-              <a:latin typeface="Avenir Medium" panose="02000503020000020003" pitchFamily="2" charset="0"/>
-              <a:ea typeface="Bodoni Ornaments" pitchFamily="2" charset="0"/>
-            </a:endParaRPr>
-          </a:p>
-          <a:p>
-            <a:r>
-              <a:rPr lang="en-US" sz="4000" dirty="0">
+            <a:pPr algn="l"/>
+            <a:r>
+              <a:rPr lang="en-US" sz="6600" dirty="0">
                 <a:solidFill>
                   <a:schemeClr val="bg1"/>
                 </a:solidFill>
                 <a:latin typeface="Avenir Medium" panose="02000503020000020003" pitchFamily="2" charset="0"/>
                 <a:ea typeface="Bodoni Ornaments" pitchFamily="2" charset="0"/>
               </a:rPr>
-              <a:t>Take my life and let it be </a:t>
-            </a:r>
-          </a:p>
-          <a:p>
-            <a:r>
-              <a:rPr lang="en-US" sz="4000" dirty="0">
-                <a:solidFill>
-                  <a:schemeClr val="bg1"/>
-                </a:solidFill>
-                <a:latin typeface="Avenir Medium" panose="02000503020000020003" pitchFamily="2" charset="0"/>
-                <a:ea typeface="Bodoni Ornaments" pitchFamily="2" charset="0"/>
-              </a:rPr>
-              <a:t>Consecrated, Lord, to Thee.</a:t>
-            </a:r>
-          </a:p>
-          <a:p>
-            <a:r>
-              <a:rPr lang="en-US" sz="4000" dirty="0">
-                <a:solidFill>
-                  <a:schemeClr val="bg1"/>
-                </a:solidFill>
-                <a:latin typeface="Avenir Medium" panose="02000503020000020003" pitchFamily="2" charset="0"/>
-                <a:ea typeface="Bodoni Ornaments" pitchFamily="2" charset="0"/>
-              </a:rPr>
-              <a:t>Take my moments and my days, </a:t>
-            </a:r>
-          </a:p>
-          <a:p>
-            <a:r>
-              <a:rPr lang="en-US" sz="4000" dirty="0">
-                <a:solidFill>
-                  <a:schemeClr val="bg1"/>
-                </a:solidFill>
-                <a:latin typeface="Avenir Medium" panose="02000503020000020003" pitchFamily="2" charset="0"/>
-                <a:ea typeface="Bodoni Ornaments" pitchFamily="2" charset="0"/>
-              </a:rPr>
-              <a:t>Let them flow in ceaseless praise.</a:t>
-            </a:r>
-          </a:p>
-          <a:p>
-            <a:r>
-              <a:rPr lang="en-US" sz="4000" dirty="0">
-                <a:solidFill>
-                  <a:schemeClr val="bg1"/>
-                </a:solidFill>
-                <a:latin typeface="Avenir Medium" panose="02000503020000020003" pitchFamily="2" charset="0"/>
-                <a:ea typeface="Bodoni Ornaments" pitchFamily="2" charset="0"/>
-              </a:rPr>
-              <a:t>Let them flow in ceaseless praise</a:t>
+              <a:t>SONG TITLE</a:t>
             </a:r>
           </a:p>
         </p:txBody>
@@ -3127,7 +3060,7 @@
         <p:cNvPr id="1" name="">
           <a:extLst>
             <a:ext uri="{FF2B5EF4-FFF2-40B4-BE49-F238E27FC236}">
-              <a16:creationId xmlns:a16="http://schemas.microsoft.com/office/drawing/2014/main" id="{105C7419-E011-28A7-9A00-12DEA80269EF}"/>
+              <a16:creationId xmlns:a16="http://schemas.microsoft.com/office/drawing/2014/main" id="{6B6DDA4A-E03B-8556-59B3-18DA3B2D1967}"/>
             </a:ext>
           </a:extLst>
         </p:cNvPr>
@@ -3147,7 +3080,7 @@
           <p:cNvPr id="3" name="Subtitle 2">
             <a:extLst>
               <a:ext uri="{FF2B5EF4-FFF2-40B4-BE49-F238E27FC236}">
-                <a16:creationId xmlns:a16="http://schemas.microsoft.com/office/drawing/2014/main" id="{76DA5D01-CA66-E4A3-D9BB-F19A657F5172}"/>
+                <a16:creationId xmlns:a16="http://schemas.microsoft.com/office/drawing/2014/main" id="{2618750F-9082-0A6E-6D44-28074BD5F0A4}"/>
               </a:ext>
             </a:extLst>
           </p:cNvPr>
@@ -3160,8 +3093,8 @@
         </p:nvSpPr>
         <p:spPr>
           <a:xfrm>
-            <a:off x="144379" y="228600"/>
-            <a:ext cx="8903369" cy="6431280"/>
+            <a:off x="84221" y="213360"/>
+            <a:ext cx="8891337" cy="6416040"/>
           </a:xfrm>
         </p:spPr>
         <p:txBody>
@@ -3196,7 +3129,7 @@
                 <a:latin typeface="Avenir Medium" panose="02000503020000020003" pitchFamily="2" charset="0"/>
                 <a:ea typeface="Bodoni Ornaments" pitchFamily="2" charset="0"/>
               </a:rPr>
-              <a:t>Take my hands, and let them move </a:t>
+              <a:t>Take my life and let it be </a:t>
             </a:r>
           </a:p>
           <a:p>
@@ -3208,7 +3141,7 @@
                 <a:latin typeface="Avenir Medium" panose="02000503020000020003" pitchFamily="2" charset="0"/>
                 <a:ea typeface="Bodoni Ornaments" pitchFamily="2" charset="0"/>
               </a:rPr>
-              <a:t>At the impulse of Thy love;</a:t>
+              <a:t>Consecrated, Lord, to Thee.</a:t>
             </a:r>
           </a:p>
           <a:p>
@@ -3220,7 +3153,7 @@
                 <a:latin typeface="Avenir Medium" panose="02000503020000020003" pitchFamily="2" charset="0"/>
                 <a:ea typeface="Bodoni Ornaments" pitchFamily="2" charset="0"/>
               </a:rPr>
-              <a:t>Take my feet and let them be </a:t>
+              <a:t>Take my moments and my days, </a:t>
             </a:r>
           </a:p>
           <a:p>
@@ -3232,7 +3165,7 @@
                 <a:latin typeface="Avenir Medium" panose="02000503020000020003" pitchFamily="2" charset="0"/>
                 <a:ea typeface="Bodoni Ornaments" pitchFamily="2" charset="0"/>
               </a:rPr>
-              <a:t>Swift and beautiful for Thee,</a:t>
+              <a:t>Let them flow in ceaseless praise.</a:t>
             </a:r>
           </a:p>
           <a:p>
@@ -3244,7 +3177,7 @@
                 <a:latin typeface="Avenir Medium" panose="02000503020000020003" pitchFamily="2" charset="0"/>
                 <a:ea typeface="Bodoni Ornaments" pitchFamily="2" charset="0"/>
               </a:rPr>
-              <a:t>Swift and beautiful for Thee</a:t>
+              <a:t>Let them flow in ceaseless praise</a:t>
             </a:r>
           </a:p>
         </p:txBody>
@@ -3252,7 +3185,7 @@
     </p:spTree>
     <p:extLst>
       <p:ext uri="{BB962C8B-B14F-4D97-AF65-F5344CB8AC3E}">
-        <p14:creationId xmlns:p14="http://schemas.microsoft.com/office/powerpoint/2010/main" val="4254184139"/>
+        <p14:creationId xmlns:p14="http://schemas.microsoft.com/office/powerpoint/2010/main" val="2164526557"/>
       </p:ext>
     </p:extLst>
   </p:cSld>
@@ -3263,311 +3196,6 @@
 </file>
 
 <file path=ppt/slides/slide3.xml><?xml version="1.0" encoding="utf-8"?>
-<p:sld xmlns:a="http://schemas.openxmlformats.org/drawingml/2006/main" xmlns:r="http://schemas.openxmlformats.org/officeDocument/2006/relationships" xmlns:p="http://schemas.openxmlformats.org/presentationml/2006/main">
-  <p:cSld>
-    <p:bg>
-      <p:bgPr>
-        <a:solidFill>
-          <a:schemeClr val="tx1"/>
-        </a:solidFill>
-        <a:effectLst/>
-      </p:bgPr>
-    </p:bg>
-    <p:spTree>
-      <p:nvGrpSpPr>
-        <p:cNvPr id="1" name="">
-          <a:extLst>
-            <a:ext uri="{FF2B5EF4-FFF2-40B4-BE49-F238E27FC236}">
-              <a16:creationId xmlns:a16="http://schemas.microsoft.com/office/drawing/2014/main" id="{7362FE4F-97C9-4BFD-2ED3-0780F4440CA5}"/>
-            </a:ext>
-          </a:extLst>
-        </p:cNvPr>
-        <p:cNvGrpSpPr/>
-        <p:nvPr/>
-      </p:nvGrpSpPr>
-      <p:grpSpPr>
-        <a:xfrm>
-          <a:off x="0" y="0"/>
-          <a:ext cx="0" cy="0"/>
-          <a:chOff x="0" y="0"/>
-          <a:chExt cx="0" cy="0"/>
-        </a:xfrm>
-      </p:grpSpPr>
-      <p:sp>
-        <p:nvSpPr>
-          <p:cNvPr id="3" name="Subtitle 2">
-            <a:extLst>
-              <a:ext uri="{FF2B5EF4-FFF2-40B4-BE49-F238E27FC236}">
-                <a16:creationId xmlns:a16="http://schemas.microsoft.com/office/drawing/2014/main" id="{3980CC98-5B94-C776-5F67-1A8761B7E723}"/>
-              </a:ext>
-            </a:extLst>
-          </p:cNvPr>
-          <p:cNvSpPr>
-            <a:spLocks noGrp="1"/>
-          </p:cNvSpPr>
-          <p:nvPr>
-            <p:ph type="subTitle" idx="1"/>
-          </p:nvPr>
-        </p:nvSpPr>
-        <p:spPr>
-          <a:xfrm>
-            <a:off x="144379" y="228600"/>
-            <a:ext cx="8903369" cy="6431280"/>
-          </a:xfrm>
-        </p:spPr>
-        <p:txBody>
-          <a:bodyPr>
-            <a:noAutofit/>
-          </a:bodyPr>
-          <a:lstStyle/>
-          <a:p>
-            <a:endParaRPr lang="en-US" sz="4000" dirty="0">
-              <a:solidFill>
-                <a:schemeClr val="bg1"/>
-              </a:solidFill>
-              <a:latin typeface="Avenir Medium" panose="02000503020000020003" pitchFamily="2" charset="0"/>
-              <a:ea typeface="Bodoni Ornaments" pitchFamily="2" charset="0"/>
-            </a:endParaRPr>
-          </a:p>
-          <a:p>
-            <a:r>
-              <a:rPr lang="en-US" sz="4000" dirty="0">
-                <a:solidFill>
-                  <a:schemeClr val="bg1"/>
-                </a:solidFill>
-                <a:latin typeface="Avenir Medium" panose="02000503020000020003" pitchFamily="2" charset="0"/>
-                <a:ea typeface="Bodoni Ornaments" pitchFamily="2" charset="0"/>
-              </a:rPr>
-              <a:t>Take my voice, and let me sing </a:t>
-            </a:r>
-          </a:p>
-          <a:p>
-            <a:r>
-              <a:rPr lang="en-US" sz="4000" dirty="0">
-                <a:solidFill>
-                  <a:schemeClr val="bg1"/>
-                </a:solidFill>
-                <a:latin typeface="Avenir Medium" panose="02000503020000020003" pitchFamily="2" charset="0"/>
-                <a:ea typeface="Bodoni Ornaments" pitchFamily="2" charset="0"/>
-              </a:rPr>
-              <a:t>Always, only, for my King;</a:t>
-            </a:r>
-          </a:p>
-          <a:p>
-            <a:r>
-              <a:rPr lang="en-US" sz="4000" dirty="0">
-                <a:solidFill>
-                  <a:schemeClr val="bg1"/>
-                </a:solidFill>
-                <a:latin typeface="Avenir Medium" panose="02000503020000020003" pitchFamily="2" charset="0"/>
-                <a:ea typeface="Bodoni Ornaments" pitchFamily="2" charset="0"/>
-              </a:rPr>
-              <a:t>Take my lips, and let them be </a:t>
-            </a:r>
-          </a:p>
-          <a:p>
-            <a:r>
-              <a:rPr lang="en-US" sz="4000" dirty="0">
-                <a:solidFill>
-                  <a:schemeClr val="bg1"/>
-                </a:solidFill>
-                <a:latin typeface="Avenir Medium" panose="02000503020000020003" pitchFamily="2" charset="0"/>
-                <a:ea typeface="Bodoni Ornaments" pitchFamily="2" charset="0"/>
-              </a:rPr>
-              <a:t>Filled with messages from Thee,</a:t>
-            </a:r>
-          </a:p>
-          <a:p>
-            <a:r>
-              <a:rPr lang="en-US" sz="4000" dirty="0">
-                <a:solidFill>
-                  <a:schemeClr val="bg1"/>
-                </a:solidFill>
-                <a:latin typeface="Avenir Medium" panose="02000503020000020003" pitchFamily="2" charset="0"/>
-                <a:ea typeface="Bodoni Ornaments" pitchFamily="2" charset="0"/>
-              </a:rPr>
-              <a:t>Filled with messages from Thee.</a:t>
-            </a:r>
-          </a:p>
-          <a:p>
-            <a:endParaRPr lang="en-US" sz="4000" dirty="0">
-              <a:solidFill>
-                <a:schemeClr val="bg1"/>
-              </a:solidFill>
-              <a:latin typeface="Avenir Medium" panose="02000503020000020003" pitchFamily="2" charset="0"/>
-              <a:ea typeface="Bodoni Ornaments" pitchFamily="2" charset="0"/>
-            </a:endParaRPr>
-          </a:p>
-        </p:txBody>
-      </p:sp>
-    </p:spTree>
-    <p:extLst>
-      <p:ext uri="{BB962C8B-B14F-4D97-AF65-F5344CB8AC3E}">
-        <p14:creationId xmlns:p14="http://schemas.microsoft.com/office/powerpoint/2010/main" val="1189714033"/>
-      </p:ext>
-    </p:extLst>
-  </p:cSld>
-  <p:clrMapOvr>
-    <a:masterClrMapping/>
-  </p:clrMapOvr>
-</p:sld>
-</file>
-
-<file path=ppt/slides/slide4.xml><?xml version="1.0" encoding="utf-8"?>
-<p:sld xmlns:a="http://schemas.openxmlformats.org/drawingml/2006/main" xmlns:r="http://schemas.openxmlformats.org/officeDocument/2006/relationships" xmlns:p="http://schemas.openxmlformats.org/presentationml/2006/main">
-  <p:cSld>
-    <p:bg>
-      <p:bgPr>
-        <a:solidFill>
-          <a:schemeClr val="tx1"/>
-        </a:solidFill>
-        <a:effectLst/>
-      </p:bgPr>
-    </p:bg>
-    <p:spTree>
-      <p:nvGrpSpPr>
-        <p:cNvPr id="1" name="">
-          <a:extLst>
-            <a:ext uri="{FF2B5EF4-FFF2-40B4-BE49-F238E27FC236}">
-              <a16:creationId xmlns:a16="http://schemas.microsoft.com/office/drawing/2014/main" id="{B652386E-0F2A-A4DA-00BE-00BA5C284095}"/>
-            </a:ext>
-          </a:extLst>
-        </p:cNvPr>
-        <p:cNvGrpSpPr/>
-        <p:nvPr/>
-      </p:nvGrpSpPr>
-      <p:grpSpPr>
-        <a:xfrm>
-          <a:off x="0" y="0"/>
-          <a:ext cx="0" cy="0"/>
-          <a:chOff x="0" y="0"/>
-          <a:chExt cx="0" cy="0"/>
-        </a:xfrm>
-      </p:grpSpPr>
-      <p:sp>
-        <p:nvSpPr>
-          <p:cNvPr id="3" name="Subtitle 2">
-            <a:extLst>
-              <a:ext uri="{FF2B5EF4-FFF2-40B4-BE49-F238E27FC236}">
-                <a16:creationId xmlns:a16="http://schemas.microsoft.com/office/drawing/2014/main" id="{635C3D88-BBBA-1C88-1408-D9D8F59C4F43}"/>
-              </a:ext>
-            </a:extLst>
-          </p:cNvPr>
-          <p:cNvSpPr>
-            <a:spLocks noGrp="1"/>
-          </p:cNvSpPr>
-          <p:nvPr>
-            <p:ph type="subTitle" idx="1"/>
-          </p:nvPr>
-        </p:nvSpPr>
-        <p:spPr>
-          <a:xfrm>
-            <a:off x="144379" y="228600"/>
-            <a:ext cx="8903369" cy="6431280"/>
-          </a:xfrm>
-        </p:spPr>
-        <p:txBody>
-          <a:bodyPr>
-            <a:noAutofit/>
-          </a:bodyPr>
-          <a:lstStyle/>
-          <a:p>
-            <a:r>
-              <a:rPr lang="en-US" sz="4000" dirty="0">
-                <a:solidFill>
-                  <a:schemeClr val="bg1"/>
-                </a:solidFill>
-                <a:latin typeface="Avenir Medium" panose="02000503020000020003" pitchFamily="2" charset="0"/>
-                <a:ea typeface="Bodoni Ornaments" pitchFamily="2" charset="0"/>
-              </a:rPr>
-              <a:t> </a:t>
-            </a:r>
-          </a:p>
-          <a:p>
-            <a:r>
-              <a:rPr lang="en-US" sz="4000" dirty="0">
-                <a:solidFill>
-                  <a:schemeClr val="bg1"/>
-                </a:solidFill>
-                <a:latin typeface="Avenir Medium" panose="02000503020000020003" pitchFamily="2" charset="0"/>
-                <a:ea typeface="Bodoni Ornaments" pitchFamily="2" charset="0"/>
-              </a:rPr>
-              <a:t>Take my will, and make it Thine; </a:t>
-            </a:r>
-          </a:p>
-          <a:p>
-            <a:r>
-              <a:rPr lang="en-US" sz="4000" dirty="0">
-                <a:solidFill>
-                  <a:schemeClr val="bg1"/>
-                </a:solidFill>
-                <a:latin typeface="Avenir Medium" panose="02000503020000020003" pitchFamily="2" charset="0"/>
-                <a:ea typeface="Bodoni Ornaments" pitchFamily="2" charset="0"/>
-              </a:rPr>
-              <a:t>It shall be no longer mine.</a:t>
-            </a:r>
-          </a:p>
-          <a:p>
-            <a:r>
-              <a:rPr lang="en-US" sz="4000" dirty="0">
-                <a:solidFill>
-                  <a:schemeClr val="bg1"/>
-                </a:solidFill>
-                <a:latin typeface="Avenir Medium" panose="02000503020000020003" pitchFamily="2" charset="0"/>
-                <a:ea typeface="Bodoni Ornaments" pitchFamily="2" charset="0"/>
-              </a:rPr>
-              <a:t>Take my heart; it is Thine own; </a:t>
-            </a:r>
-          </a:p>
-          <a:p>
-            <a:r>
-              <a:rPr lang="en-US" sz="4000" dirty="0">
-                <a:solidFill>
-                  <a:schemeClr val="bg1"/>
-                </a:solidFill>
-                <a:latin typeface="Avenir Medium" panose="02000503020000020003" pitchFamily="2" charset="0"/>
-                <a:ea typeface="Bodoni Ornaments" pitchFamily="2" charset="0"/>
-              </a:rPr>
-              <a:t>It shall be Thy royal throne,</a:t>
-            </a:r>
-          </a:p>
-          <a:p>
-            <a:r>
-              <a:rPr lang="en-US" sz="4000" dirty="0">
-                <a:solidFill>
-                  <a:schemeClr val="bg1"/>
-                </a:solidFill>
-                <a:latin typeface="Avenir Medium" panose="02000503020000020003" pitchFamily="2" charset="0"/>
-                <a:ea typeface="Bodoni Ornaments" pitchFamily="2" charset="0"/>
-              </a:rPr>
-              <a:t>It shall be Thy royal throne.</a:t>
-            </a:r>
-          </a:p>
-          <a:p>
-            <a:endParaRPr lang="en-US" sz="4000" dirty="0">
-              <a:solidFill>
-                <a:schemeClr val="bg1"/>
-              </a:solidFill>
-              <a:latin typeface="Avenir Medium" panose="02000503020000020003" pitchFamily="2" charset="0"/>
-              <a:ea typeface="Bodoni Ornaments" pitchFamily="2" charset="0"/>
-            </a:endParaRPr>
-          </a:p>
-        </p:txBody>
-      </p:sp>
-    </p:spTree>
-    <p:extLst>
-      <p:ext uri="{BB962C8B-B14F-4D97-AF65-F5344CB8AC3E}">
-        <p14:creationId xmlns:p14="http://schemas.microsoft.com/office/powerpoint/2010/main" val="1597081553"/>
-      </p:ext>
-    </p:extLst>
-  </p:cSld>
-  <p:clrMapOvr>
-    <a:masterClrMapping/>
-  </p:clrMapOvr>
-</p:sld>
-</file>
-
-<file path=ppt/slides/slide5.xml><?xml version="1.0" encoding="utf-8"?>
 <p:sld xmlns:a="http://schemas.openxmlformats.org/drawingml/2006/main" xmlns:r="http://schemas.openxmlformats.org/officeDocument/2006/relationships" xmlns:p="http://schemas.openxmlformats.org/presentationml/2006/main">
   <p:cSld>
     <p:bg>
